--- a/Factor_Analysis_JobSatisfaction_Presentation.pptx
+++ b/Factor_Analysis_JobSatisfaction_Presentation.pptx
@@ -29,6 +29,9 @@
     <p:sldId id="277" r:id="rId28"/>
     <p:sldId id="278" r:id="rId29"/>
     <p:sldId id="279" r:id="rId30"/>
+    <p:sldId id="280" r:id="rId31"/>
+    <p:sldId id="281" r:id="rId32"/>
+    <p:sldId id="282" r:id="rId33"/>
   </p:sldIdLst>
   <p:sldSz cx="9144000" cy="6858000" type="screen4x3"/>
   <p:notesSz cx="6858000" cy="9144000"/>
@@ -3595,14 +3598,14 @@
               </a:defRPr>
             </a:pPr>
             <a:r>
-              <a:t>Step 2: Factor Extraction - Scree Plot</a:t>
+              <a:t>Step 2: Correlation Matrix</a:t>
             </a:r>
           </a:p>
         </p:txBody>
       </p:sp>
       <p:pic>
         <p:nvPicPr>
-          <p:cNvPr id="3" name="Picture 2" descr="scree_plot.png"/>
+          <p:cNvPr id="3" name="Picture 2" descr="correlation_matrix.png"/>
           <p:cNvPicPr>
             <a:picLocks noChangeAspect="1"/>
           </p:cNvPicPr>
@@ -3617,7 +3620,7 @@
         <p:spPr>
           <a:xfrm>
             <a:off x="182880" y="1280160"/>
-            <a:ext cx="4846320" cy="4389120"/>
+            <a:ext cx="5029200" cy="4754880"/>
           </a:xfrm>
           <a:prstGeom prst="rect">
             <a:avLst/>
@@ -3632,8 +3635,8 @@
         </p:nvSpPr>
         <p:spPr>
           <a:xfrm>
-            <a:off x="5120640" y="1280160"/>
-            <a:ext cx="3840480" cy="5029200"/>
+            <a:off x="5303520" y="1280160"/>
+            <a:ext cx="3657600" cy="5029200"/>
           </a:xfrm>
           <a:prstGeom prst="rect">
             <a:avLst/>
@@ -3647,14 +3650,26 @@
           <a:lstStyle/>
           <a:p>
             <a:pPr>
-              <a:defRPr sz="1500" b="1">
+              <a:defRPr sz="1400" b="1">
                 <a:solidFill>
                   <a:srgbClr val="002060"/>
                 </a:solidFill>
               </a:defRPr>
             </a:pPr>
             <a:r>
-              <a:t>How Many Factors?</a:t>
+              <a:t>What is the Correlation Matrix?</a:t>
+            </a:r>
+          </a:p>
+          <a:p>
+            <a:pPr>
+              <a:defRPr sz="1100">
+                <a:solidFill>
+                  <a:srgbClr val="323232"/>
+                </a:solidFill>
+              </a:defRPr>
+            </a:pPr>
+            <a:r>
+              <a:t>Shows how strongly each pair of variables is related to each other</a:t>
             </a:r>
           </a:p>
           <a:p>
@@ -3671,31 +3686,19 @@
               </a:defRPr>
             </a:pPr>
             <a:r>
-              <a:t>Kaiser Criterion:</a:t>
-            </a:r>
-          </a:p>
-          <a:p>
-            <a:pPr>
-              <a:defRPr sz="1200">
-                <a:solidFill>
-                  <a:srgbClr val="323232"/>
-                </a:solidFill>
-              </a:defRPr>
-            </a:pPr>
-            <a:r>
-              <a:t>Keep factors with eigenvalue &gt; 1.0</a:t>
-            </a:r>
-          </a:p>
-          <a:p>
-            <a:pPr>
-              <a:defRPr sz="1200">
-                <a:solidFill>
-                  <a:srgbClr val="323232"/>
-                </a:solidFill>
-              </a:defRPr>
-            </a:pPr>
-            <a:r>
-              <a:t>6 factors exceeded this threshold</a:t>
+              <a:t>Why It Matters:</a:t>
+            </a:r>
+          </a:p>
+          <a:p>
+            <a:pPr>
+              <a:defRPr sz="1100">
+                <a:solidFill>
+                  <a:srgbClr val="323232"/>
+                </a:solidFill>
+              </a:defRPr>
+            </a:pPr>
+            <a:r>
+              <a:t>Variables must be correlated (but not too highly) for FA to work</a:t>
             </a:r>
           </a:p>
           <a:p>
@@ -3712,31 +3715,19 @@
               </a:defRPr>
             </a:pPr>
             <a:r>
-              <a:t>Extraction Method:</a:t>
-            </a:r>
-          </a:p>
-          <a:p>
-            <a:pPr>
-              <a:defRPr sz="1200">
-                <a:solidFill>
-                  <a:srgbClr val="323232"/>
-                </a:solidFill>
-              </a:defRPr>
-            </a:pPr>
-            <a:r>
-              <a:t>Principal Component Analysis (PCA)</a:t>
-            </a:r>
-          </a:p>
-          <a:p>
-            <a:pPr>
-              <a:defRPr sz="1200">
-                <a:solidFill>
-                  <a:srgbClr val="323232"/>
-                </a:solidFill>
-              </a:defRPr>
-            </a:pPr>
-            <a:r>
-              <a:t>Varimax rotation (orthogonal)</a:t>
+              <a:t>Key Observations:</a:t>
+            </a:r>
+          </a:p>
+          <a:p>
+            <a:pPr>
+              <a:defRPr sz="1100">
+                <a:solidFill>
+                  <a:srgbClr val="323232"/>
+                </a:solidFill>
+              </a:defRPr>
+            </a:pPr>
+            <a:r>
+              <a:t>Subscale intercorrelations range from 0.11 to 0.59 (Spector, 1985)</a:t>
             </a:r>
           </a:p>
           <a:p>
@@ -3746,26 +3737,14 @@
           </a:p>
           <a:p>
             <a:pPr>
-              <a:defRPr sz="1300" b="1">
-                <a:solidFill>
-                  <a:srgbClr val="00468C"/>
-                </a:solidFill>
-              </a:defRPr>
-            </a:pPr>
-            <a:r>
-              <a:t>Factor Loading Threshold:</a:t>
-            </a:r>
-          </a:p>
-          <a:p>
-            <a:pPr>
-              <a:defRPr sz="1200">
-                <a:solidFill>
-                  <a:srgbClr val="323232"/>
-                </a:solidFill>
-              </a:defRPr>
-            </a:pPr>
-            <a:r>
-              <a:t>Items with loadings &gt;= 0.50 retained</a:t>
+              <a:defRPr sz="1100">
+                <a:solidFill>
+                  <a:srgbClr val="323232"/>
+                </a:solidFill>
+              </a:defRPr>
+            </a:pPr>
+            <a:r>
+              <a:t>Moderate correlations = variables share some variance but remain distinct</a:t>
             </a:r>
           </a:p>
           <a:p>
@@ -3775,26 +3754,14 @@
           </a:p>
           <a:p>
             <a:pPr>
-              <a:defRPr sz="1300" b="1">
-                <a:solidFill>
-                  <a:srgbClr val="008000"/>
-                </a:solidFill>
-              </a:defRPr>
-            </a:pPr>
-            <a:r>
-              <a:t>Result:</a:t>
-            </a:r>
-          </a:p>
-          <a:p>
-            <a:pPr>
-              <a:defRPr sz="1200">
-                <a:solidFill>
-                  <a:srgbClr val="323232"/>
-                </a:solidFill>
-              </a:defRPr>
-            </a:pPr>
-            <a:r>
-              <a:t>6 clear factors emerged from the 36 items</a:t>
+              <a:defRPr sz="1100">
+                <a:solidFill>
+                  <a:srgbClr val="323232"/>
+                </a:solidFill>
+              </a:defRPr>
+            </a:pPr>
+            <a:r>
+              <a:t>Operating Procedures has the weakest correlations with other subscales</a:t>
             </a:r>
           </a:p>
           <a:p>
@@ -3804,6 +3771,23 @@
           </a:p>
           <a:p>
             <a:pPr>
+              <a:defRPr sz="1100">
+                <a:solidFill>
+                  <a:srgbClr val="323232"/>
+                </a:solidFill>
+              </a:defRPr>
+            </a:pPr>
+            <a:r>
+              <a:t>Supervision and Coworkers show a strong link (r = 0.59)</a:t>
+            </a:r>
+          </a:p>
+          <a:p>
+            <a:pPr>
+              <a:defRPr sz="600"/>
+            </a:pPr>
+          </a:p>
+          <a:p>
+            <a:pPr>
               <a:defRPr sz="900" b="0">
                 <a:solidFill>
                   <a:srgbClr val="323232"/>
@@ -3811,7 +3795,7 @@
               </a:defRPr>
             </a:pPr>
             <a:r>
-              <a:t>Note: Eigenvalues are illustrative;</a:t>
+              <a:t>Illustrative values based on the</a:t>
             </a:r>
           </a:p>
           <a:p>
@@ -3823,7 +3807,7 @@
               </a:defRPr>
             </a:pPr>
             <a:r>
-              <a:t>6-factor solution directly reported</a:t>
+              <a:t>reported intercorrelation range</a:t>
             </a:r>
           </a:p>
         </p:txBody>
@@ -3901,14 +3885,14 @@
               </a:defRPr>
             </a:pPr>
             <a:r>
-              <a:t>Step 3: Reliability Analysis (Cronbach's Alpha)</a:t>
+              <a:t>Step 3: Factor Extraction - Scree Plot</a:t>
             </a:r>
           </a:p>
         </p:txBody>
       </p:sp>
       <p:pic>
         <p:nvPicPr>
-          <p:cNvPr id="3" name="Picture 2" descr="cronbach_alpha.png"/>
+          <p:cNvPr id="3" name="Picture 2" descr="scree_plot.png"/>
           <p:cNvPicPr>
             <a:picLocks noChangeAspect="1"/>
           </p:cNvPicPr>
@@ -3922,8 +3906,8 @@
         </p:blipFill>
         <p:spPr>
           <a:xfrm>
-            <a:off x="182880" y="1371600"/>
-            <a:ext cx="5029200" cy="4114800"/>
+            <a:off x="182880" y="1280160"/>
+            <a:ext cx="4846320" cy="4389120"/>
           </a:xfrm>
           <a:prstGeom prst="rect">
             <a:avLst/>
@@ -3938,8 +3922,8 @@
         </p:nvSpPr>
         <p:spPr>
           <a:xfrm>
-            <a:off x="5303520" y="1371600"/>
-            <a:ext cx="3657600" cy="4572000"/>
+            <a:off x="5120640" y="1280160"/>
+            <a:ext cx="3840480" cy="5029200"/>
           </a:xfrm>
           <a:prstGeom prst="rect">
             <a:avLst/>
@@ -3953,26 +3937,14 @@
           <a:lstStyle/>
           <a:p>
             <a:pPr>
-              <a:defRPr sz="1400" b="1">
+              <a:defRPr sz="1500" b="1">
                 <a:solidFill>
                   <a:srgbClr val="002060"/>
                 </a:solidFill>
               </a:defRPr>
             </a:pPr>
             <a:r>
-              <a:t>What is Cronbach's Alpha?</a:t>
-            </a:r>
-          </a:p>
-          <a:p>
-            <a:pPr>
-              <a:defRPr sz="1100">
-                <a:solidFill>
-                  <a:srgbClr val="323232"/>
-                </a:solidFill>
-              </a:defRPr>
-            </a:pPr>
-            <a:r>
-              <a:t>Measures how consistently the survey items within each dimension measure the same thing</a:t>
+              <a:t>How Many Factors?</a:t>
             </a:r>
           </a:p>
           <a:p>
@@ -3989,31 +3961,31 @@
               </a:defRPr>
             </a:pPr>
             <a:r>
-              <a:t>Interpretation:</a:t>
-            </a:r>
-          </a:p>
-          <a:p>
-            <a:pPr>
-              <a:defRPr sz="1100">
-                <a:solidFill>
-                  <a:srgbClr val="323232"/>
-                </a:solidFill>
-              </a:defRPr>
-            </a:pPr>
-            <a:r>
-              <a:t>α &gt;= 0.70 = Acceptable reliability</a:t>
-            </a:r>
-          </a:p>
-          <a:p>
-            <a:pPr>
-              <a:defRPr sz="1100">
-                <a:solidFill>
-                  <a:srgbClr val="323232"/>
-                </a:solidFill>
-              </a:defRPr>
-            </a:pPr>
-            <a:r>
-              <a:t>α &gt;= 0.80 = Good reliability</a:t>
+              <a:t>Kaiser Criterion:</a:t>
+            </a:r>
+          </a:p>
+          <a:p>
+            <a:pPr>
+              <a:defRPr sz="1200">
+                <a:solidFill>
+                  <a:srgbClr val="323232"/>
+                </a:solidFill>
+              </a:defRPr>
+            </a:pPr>
+            <a:r>
+              <a:t>Keep factors with eigenvalue &gt; 1.0</a:t>
+            </a:r>
+          </a:p>
+          <a:p>
+            <a:pPr>
+              <a:defRPr sz="1200">
+                <a:solidFill>
+                  <a:srgbClr val="323232"/>
+                </a:solidFill>
+              </a:defRPr>
+            </a:pPr>
+            <a:r>
+              <a:t>6 factors exceeded this threshold</a:t>
             </a:r>
           </a:p>
           <a:p>
@@ -4025,36 +3997,94 @@
             <a:pPr>
               <a:defRPr sz="1300" b="1">
                 <a:solidFill>
+                  <a:srgbClr val="00468C"/>
+                </a:solidFill>
+              </a:defRPr>
+            </a:pPr>
+            <a:r>
+              <a:t>Extraction Method:</a:t>
+            </a:r>
+          </a:p>
+          <a:p>
+            <a:pPr>
+              <a:defRPr sz="1200">
+                <a:solidFill>
+                  <a:srgbClr val="323232"/>
+                </a:solidFill>
+              </a:defRPr>
+            </a:pPr>
+            <a:r>
+              <a:t>Principal Component Analysis (PCA)</a:t>
+            </a:r>
+          </a:p>
+          <a:p>
+            <a:pPr>
+              <a:defRPr sz="1200">
+                <a:solidFill>
+                  <a:srgbClr val="323232"/>
+                </a:solidFill>
+              </a:defRPr>
+            </a:pPr>
+            <a:r>
+              <a:t>Varimax rotation (orthogonal)</a:t>
+            </a:r>
+          </a:p>
+          <a:p>
+            <a:pPr>
+              <a:defRPr sz="600"/>
+            </a:pPr>
+          </a:p>
+          <a:p>
+            <a:pPr>
+              <a:defRPr sz="1300" b="1">
+                <a:solidFill>
+                  <a:srgbClr val="00468C"/>
+                </a:solidFill>
+              </a:defRPr>
+            </a:pPr>
+            <a:r>
+              <a:t>Factor Loading Threshold:</a:t>
+            </a:r>
+          </a:p>
+          <a:p>
+            <a:pPr>
+              <a:defRPr sz="1200">
+                <a:solidFill>
+                  <a:srgbClr val="323232"/>
+                </a:solidFill>
+              </a:defRPr>
+            </a:pPr>
+            <a:r>
+              <a:t>Items with loadings &gt;= 0.50 retained</a:t>
+            </a:r>
+          </a:p>
+          <a:p>
+            <a:pPr>
+              <a:defRPr sz="600"/>
+            </a:pPr>
+          </a:p>
+          <a:p>
+            <a:pPr>
+              <a:defRPr sz="1300" b="1">
+                <a:solidFill>
                   <a:srgbClr val="008000"/>
                 </a:solidFill>
               </a:defRPr>
             </a:pPr>
             <a:r>
-              <a:t>Results:</a:t>
-            </a:r>
-          </a:p>
-          <a:p>
-            <a:pPr>
-              <a:defRPr sz="1100">
-                <a:solidFill>
-                  <a:srgbClr val="323232"/>
-                </a:solidFill>
-              </a:defRPr>
-            </a:pPr>
-            <a:r>
-              <a:t>Overall scale: α = 0.81 (Good)</a:t>
-            </a:r>
-          </a:p>
-          <a:p>
-            <a:pPr>
-              <a:defRPr sz="1100">
-                <a:solidFill>
-                  <a:srgbClr val="323232"/>
-                </a:solidFill>
-              </a:defRPr>
-            </a:pPr>
-            <a:r>
-              <a:t>Range: 0.61 to 0.81</a:t>
+              <a:t>Result:</a:t>
+            </a:r>
+          </a:p>
+          <a:p>
+            <a:pPr>
+              <a:defRPr sz="1200">
+                <a:solidFill>
+                  <a:srgbClr val="323232"/>
+                </a:solidFill>
+              </a:defRPr>
+            </a:pPr>
+            <a:r>
+              <a:t>6 clear factors emerged from the 36 items</a:t>
             </a:r>
           </a:p>
           <a:p>
@@ -4064,43 +4094,26 @@
           </a:p>
           <a:p>
             <a:pPr>
-              <a:defRPr sz="1200" b="1">
-                <a:solidFill>
-                  <a:srgbClr val="00468C"/>
-                </a:solidFill>
-              </a:defRPr>
-            </a:pPr>
-            <a:r>
-              <a:t>5 of 6 dimensions meet</a:t>
-            </a:r>
-          </a:p>
-          <a:p>
-            <a:pPr>
-              <a:defRPr sz="1200" b="1">
-                <a:solidFill>
-                  <a:srgbClr val="00468C"/>
-                </a:solidFill>
-              </a:defRPr>
-            </a:pPr>
-            <a:r>
-              <a:t>the 0.70 threshold</a:t>
-            </a:r>
-          </a:p>
-          <a:p>
-            <a:pPr>
-              <a:defRPr sz="600"/>
-            </a:pPr>
-          </a:p>
-          <a:p>
-            <a:pPr>
-              <a:defRPr sz="1000" b="1">
-                <a:solidFill>
-                  <a:srgbClr val="0070C0"/>
-                </a:solidFill>
-              </a:defRPr>
-            </a:pPr>
-            <a:r>
-              <a:t>Source: Tsounis &amp; Sarafis (2022)</a:t>
+              <a:defRPr sz="900" b="0">
+                <a:solidFill>
+                  <a:srgbClr val="323232"/>
+                </a:solidFill>
+              </a:defRPr>
+            </a:pPr>
+            <a:r>
+              <a:t>Note: Eigenvalues are illustrative;</a:t>
+            </a:r>
+          </a:p>
+          <a:p>
+            <a:pPr>
+              <a:defRPr sz="900" b="0">
+                <a:solidFill>
+                  <a:srgbClr val="323232"/>
+                </a:solidFill>
+              </a:defRPr>
+            </a:pPr>
+            <a:r>
+              <a:t>6-factor solution directly reported</a:t>
             </a:r>
           </a:p>
         </p:txBody>
@@ -4178,7 +4191,855 @@
               </a:defRPr>
             </a:pPr>
             <a:r>
-              <a:t>Step 4: CFA Model Fit Assessment</a:t>
+              <a:t>Step 4: Rotated Factor Loading Matrix</a:t>
+            </a:r>
+          </a:p>
+        </p:txBody>
+      </p:sp>
+      <p:pic>
+        <p:nvPicPr>
+          <p:cNvPr id="3" name="Picture 2" descr="factor_loading_matrix.png"/>
+          <p:cNvPicPr>
+            <a:picLocks noChangeAspect="1"/>
+          </p:cNvPicPr>
+          <p:nvPr/>
+        </p:nvPicPr>
+        <p:blipFill>
+          <a:blip r:embed="rId2"/>
+          <a:stretch>
+            <a:fillRect/>
+          </a:stretch>
+        </p:blipFill>
+        <p:spPr>
+          <a:xfrm>
+            <a:off x="182880" y="1280160"/>
+            <a:ext cx="5486400" cy="4572000"/>
+          </a:xfrm>
+          <a:prstGeom prst="rect">
+            <a:avLst/>
+          </a:prstGeom>
+        </p:spPr>
+      </p:pic>
+      <p:sp>
+        <p:nvSpPr>
+          <p:cNvPr id="4" name="TextBox 3"/>
+          <p:cNvSpPr txBox="1"/>
+          <p:nvPr/>
+        </p:nvSpPr>
+        <p:spPr>
+          <a:xfrm>
+            <a:off x="5760720" y="1280160"/>
+            <a:ext cx="3200400" cy="5029200"/>
+          </a:xfrm>
+          <a:prstGeom prst="rect">
+            <a:avLst/>
+          </a:prstGeom>
+          <a:noFill/>
+        </p:spPr>
+        <p:txBody>
+          <a:bodyPr wrap="square">
+            <a:spAutoFit/>
+          </a:bodyPr>
+          <a:lstStyle/>
+          <a:p>
+            <a:pPr>
+              <a:defRPr sz="1400" b="1">
+                <a:solidFill>
+                  <a:srgbClr val="002060"/>
+                </a:solidFill>
+              </a:defRPr>
+            </a:pPr>
+            <a:r>
+              <a:t>What Are Factor Loadings?</a:t>
+            </a:r>
+          </a:p>
+          <a:p>
+            <a:pPr>
+              <a:defRPr sz="1100">
+                <a:solidFill>
+                  <a:srgbClr val="323232"/>
+                </a:solidFill>
+              </a:defRPr>
+            </a:pPr>
+            <a:r>
+              <a:t>They show how strongly each survey item belongs to each factor</a:t>
+            </a:r>
+          </a:p>
+          <a:p>
+            <a:pPr>
+              <a:defRPr sz="600"/>
+            </a:pPr>
+          </a:p>
+          <a:p>
+            <a:pPr>
+              <a:defRPr sz="1300" b="1">
+                <a:solidFill>
+                  <a:srgbClr val="00468C"/>
+                </a:solidFill>
+              </a:defRPr>
+            </a:pPr>
+            <a:r>
+              <a:t>Reading the Matrix:</a:t>
+            </a:r>
+          </a:p>
+          <a:p>
+            <a:pPr>
+              <a:defRPr sz="1100">
+                <a:solidFill>
+                  <a:srgbClr val="323232"/>
+                </a:solidFill>
+              </a:defRPr>
+            </a:pPr>
+            <a:r>
+              <a:t>High loading (&gt;= 0.50) = item belongs to that factor</a:t>
+            </a:r>
+          </a:p>
+          <a:p>
+            <a:pPr>
+              <a:defRPr sz="1100">
+                <a:solidFill>
+                  <a:srgbClr val="323232"/>
+                </a:solidFill>
+              </a:defRPr>
+            </a:pPr>
+            <a:r>
+              <a:t>Low loading (&lt; 0.30) = weak or no relationship</a:t>
+            </a:r>
+          </a:p>
+          <a:p>
+            <a:pPr>
+              <a:defRPr sz="600"/>
+            </a:pPr>
+          </a:p>
+          <a:p>
+            <a:pPr>
+              <a:defRPr sz="1300" b="1">
+                <a:solidFill>
+                  <a:srgbClr val="00468C"/>
+                </a:solidFill>
+              </a:defRPr>
+            </a:pPr>
+            <a:r>
+              <a:t>Rotation: Varimax</a:t>
+            </a:r>
+          </a:p>
+          <a:p>
+            <a:pPr>
+              <a:defRPr sz="1100">
+                <a:solidFill>
+                  <a:srgbClr val="323232"/>
+                </a:solidFill>
+              </a:defRPr>
+            </a:pPr>
+            <a:r>
+              <a:t>Makes the pattern clearer by maximizing high loadings and minimizing low ones</a:t>
+            </a:r>
+          </a:p>
+          <a:p>
+            <a:pPr>
+              <a:defRPr sz="600"/>
+            </a:pPr>
+          </a:p>
+          <a:p>
+            <a:pPr>
+              <a:defRPr sz="1200" b="1">
+                <a:solidFill>
+                  <a:srgbClr val="008000"/>
+                </a:solidFill>
+              </a:defRPr>
+            </a:pPr>
+            <a:r>
+              <a:t>Each item loads strongly</a:t>
+            </a:r>
+          </a:p>
+          <a:p>
+            <a:pPr>
+              <a:defRPr sz="1200" b="1">
+                <a:solidFill>
+                  <a:srgbClr val="008000"/>
+                </a:solidFill>
+              </a:defRPr>
+            </a:pPr>
+            <a:r>
+              <a:t>on only ONE factor</a:t>
+            </a:r>
+          </a:p>
+          <a:p>
+            <a:pPr>
+              <a:defRPr sz="600"/>
+            </a:pPr>
+          </a:p>
+          <a:p>
+            <a:pPr>
+              <a:defRPr sz="900" b="0">
+                <a:solidFill>
+                  <a:srgbClr val="323232"/>
+                </a:solidFill>
+              </a:defRPr>
+            </a:pPr>
+            <a:r>
+              <a:t>Illustrative values; items</a:t>
+            </a:r>
+          </a:p>
+          <a:p>
+            <a:pPr>
+              <a:defRPr sz="900" b="0">
+                <a:solidFill>
+                  <a:srgbClr val="323232"/>
+                </a:solidFill>
+              </a:defRPr>
+            </a:pPr>
+            <a:r>
+              <a:t>with loadings &gt;= 0.50 retained</a:t>
+            </a:r>
+          </a:p>
+        </p:txBody>
+      </p:sp>
+    </p:spTree>
+  </p:cSld>
+  <p:clrMapOvr>
+    <a:masterClrMapping/>
+  </p:clrMapOvr>
+</p:sld>
+</file>
+
+<file path=ppt/slides/slide14.xml><?xml version="1.0" encoding="utf-8"?>
+<p:sld xmlns:a="http://schemas.openxmlformats.org/drawingml/2006/main" xmlns:p="http://schemas.openxmlformats.org/presentationml/2006/main" xmlns:r="http://schemas.openxmlformats.org/officeDocument/2006/relationships">
+  <p:cSld>
+    <p:bg>
+      <p:bgPr>
+        <a:solidFill>
+          <a:srgbClr val="FFFFFF"/>
+        </a:solidFill>
+        <a:effectLst/>
+      </p:bgPr>
+    </p:bg>
+    <p:spTree>
+      <p:nvGrpSpPr>
+        <p:cNvPr id="1" name=""/>
+        <p:cNvGrpSpPr/>
+        <p:nvPr/>
+      </p:nvGrpSpPr>
+      <p:grpSpPr/>
+      <p:sp>
+        <p:nvSpPr>
+          <p:cNvPr id="2" name="Rectangle 1"/>
+          <p:cNvSpPr/>
+          <p:nvPr/>
+        </p:nvSpPr>
+        <p:spPr>
+          <a:xfrm>
+            <a:off x="0" y="0"/>
+            <a:ext cx="9144000" cy="1097280"/>
+          </a:xfrm>
+          <a:prstGeom prst="rect">
+            <a:avLst/>
+          </a:prstGeom>
+          <a:solidFill>
+            <a:srgbClr val="002060"/>
+          </a:solidFill>
+          <a:ln>
+            <a:noFill/>
+          </a:ln>
+        </p:spPr>
+        <p:style>
+          <a:lnRef idx="1">
+            <a:schemeClr val="accent1"/>
+          </a:lnRef>
+          <a:fillRef idx="3">
+            <a:schemeClr val="accent1"/>
+          </a:fillRef>
+          <a:effectRef idx="2">
+            <a:schemeClr val="accent1"/>
+          </a:effectRef>
+          <a:fontRef idx="minor">
+            <a:schemeClr val="lt1"/>
+          </a:fontRef>
+        </p:style>
+        <p:txBody>
+          <a:bodyPr rtlCol="0" anchor="ctr" wrap="square" lIns="457200" tIns="137160"/>
+          <a:lstStyle/>
+          <a:p>
+            <a:pPr algn="l">
+              <a:defRPr sz="2800" b="1">
+                <a:solidFill>
+                  <a:srgbClr val="FFFFFF"/>
+                </a:solidFill>
+              </a:defRPr>
+            </a:pPr>
+            <a:r>
+              <a:t>Step 5: Communalities</a:t>
+            </a:r>
+          </a:p>
+        </p:txBody>
+      </p:sp>
+      <p:pic>
+        <p:nvPicPr>
+          <p:cNvPr id="3" name="Picture 2" descr="communalities.png"/>
+          <p:cNvPicPr>
+            <a:picLocks noChangeAspect="1"/>
+          </p:cNvPicPr>
+          <p:nvPr/>
+        </p:nvPicPr>
+        <p:blipFill>
+          <a:blip r:embed="rId2"/>
+          <a:stretch>
+            <a:fillRect/>
+          </a:stretch>
+        </p:blipFill>
+        <p:spPr>
+          <a:xfrm>
+            <a:off x="182880" y="1280160"/>
+            <a:ext cx="5486400" cy="4389120"/>
+          </a:xfrm>
+          <a:prstGeom prst="rect">
+            <a:avLst/>
+          </a:prstGeom>
+        </p:spPr>
+      </p:pic>
+      <p:sp>
+        <p:nvSpPr>
+          <p:cNvPr id="4" name="TextBox 3"/>
+          <p:cNvSpPr txBox="1"/>
+          <p:nvPr/>
+        </p:nvSpPr>
+        <p:spPr>
+          <a:xfrm>
+            <a:off x="5760720" y="1280160"/>
+            <a:ext cx="3200400" cy="5029200"/>
+          </a:xfrm>
+          <a:prstGeom prst="rect">
+            <a:avLst/>
+          </a:prstGeom>
+          <a:noFill/>
+        </p:spPr>
+        <p:txBody>
+          <a:bodyPr wrap="square">
+            <a:spAutoFit/>
+          </a:bodyPr>
+          <a:lstStyle/>
+          <a:p>
+            <a:pPr>
+              <a:defRPr sz="1400" b="1">
+                <a:solidFill>
+                  <a:srgbClr val="002060"/>
+                </a:solidFill>
+              </a:defRPr>
+            </a:pPr>
+            <a:r>
+              <a:t>What Are Communalities?</a:t>
+            </a:r>
+          </a:p>
+          <a:p>
+            <a:pPr>
+              <a:defRPr sz="1100">
+                <a:solidFill>
+                  <a:srgbClr val="323232"/>
+                </a:solidFill>
+              </a:defRPr>
+            </a:pPr>
+            <a:r>
+              <a:t>The proportion of each variable's variance that is explained by the extracted factors</a:t>
+            </a:r>
+          </a:p>
+          <a:p>
+            <a:pPr>
+              <a:defRPr sz="600"/>
+            </a:pPr>
+          </a:p>
+          <a:p>
+            <a:pPr>
+              <a:defRPr sz="1300" b="1">
+                <a:solidFill>
+                  <a:srgbClr val="00468C"/>
+                </a:solidFill>
+              </a:defRPr>
+            </a:pPr>
+            <a:r>
+              <a:t>How to Read:</a:t>
+            </a:r>
+          </a:p>
+          <a:p>
+            <a:pPr>
+              <a:defRPr sz="1100">
+                <a:solidFill>
+                  <a:srgbClr val="323232"/>
+                </a:solidFill>
+              </a:defRPr>
+            </a:pPr>
+            <a:r>
+              <a:t>Initial = 1.0 (100% of variance)</a:t>
+            </a:r>
+          </a:p>
+          <a:p>
+            <a:pPr>
+              <a:defRPr sz="1100">
+                <a:solidFill>
+                  <a:srgbClr val="323232"/>
+                </a:solidFill>
+              </a:defRPr>
+            </a:pPr>
+            <a:r>
+              <a:t>Extraction = how much the factors capture</a:t>
+            </a:r>
+          </a:p>
+          <a:p>
+            <a:pPr>
+              <a:defRPr sz="600"/>
+            </a:pPr>
+          </a:p>
+          <a:p>
+            <a:pPr>
+              <a:defRPr sz="1300" b="1">
+                <a:solidFill>
+                  <a:srgbClr val="00468C"/>
+                </a:solidFill>
+              </a:defRPr>
+            </a:pPr>
+            <a:r>
+              <a:t>Threshold:</a:t>
+            </a:r>
+          </a:p>
+          <a:p>
+            <a:pPr>
+              <a:defRPr sz="1100">
+                <a:solidFill>
+                  <a:srgbClr val="323232"/>
+                </a:solidFill>
+              </a:defRPr>
+            </a:pPr>
+            <a:r>
+              <a:t>Values &gt;= 0.50 = good (factors explain at least 50% of that variable's variance)</a:t>
+            </a:r>
+          </a:p>
+          <a:p>
+            <a:pPr>
+              <a:defRPr sz="600"/>
+            </a:pPr>
+          </a:p>
+          <a:p>
+            <a:pPr>
+              <a:defRPr sz="1300" b="1">
+                <a:solidFill>
+                  <a:srgbClr val="008000"/>
+                </a:solidFill>
+              </a:defRPr>
+            </a:pPr>
+            <a:r>
+              <a:t>Key Observation:</a:t>
+            </a:r>
+          </a:p>
+          <a:p>
+            <a:pPr>
+              <a:defRPr sz="1100">
+                <a:solidFill>
+                  <a:srgbClr val="323232"/>
+                </a:solidFill>
+              </a:defRPr>
+            </a:pPr>
+            <a:r>
+              <a:t>Most variables have communalities above 0.50</a:t>
+            </a:r>
+          </a:p>
+          <a:p>
+            <a:pPr>
+              <a:defRPr sz="600"/>
+            </a:pPr>
+          </a:p>
+          <a:p>
+            <a:pPr>
+              <a:defRPr sz="1100">
+                <a:solidFill>
+                  <a:srgbClr val="323232"/>
+                </a:solidFill>
+              </a:defRPr>
+            </a:pPr>
+            <a:r>
+              <a:t>Operating Procedures is lowest (0.38) - weakest fit</a:t>
+            </a:r>
+          </a:p>
+          <a:p>
+            <a:pPr>
+              <a:defRPr sz="600"/>
+            </a:pPr>
+          </a:p>
+          <a:p>
+            <a:pPr>
+              <a:defRPr sz="900" b="0">
+                <a:solidFill>
+                  <a:srgbClr val="323232"/>
+                </a:solidFill>
+              </a:defRPr>
+            </a:pPr>
+            <a:r>
+              <a:t>Illustrative values based on</a:t>
+            </a:r>
+          </a:p>
+          <a:p>
+            <a:pPr>
+              <a:defRPr sz="900" b="0">
+                <a:solidFill>
+                  <a:srgbClr val="323232"/>
+                </a:solidFill>
+              </a:defRPr>
+            </a:pPr>
+            <a:r>
+              <a:t>6-factor solution</a:t>
+            </a:r>
+          </a:p>
+        </p:txBody>
+      </p:sp>
+    </p:spTree>
+  </p:cSld>
+  <p:clrMapOvr>
+    <a:masterClrMapping/>
+  </p:clrMapOvr>
+</p:sld>
+</file>
+
+<file path=ppt/slides/slide15.xml><?xml version="1.0" encoding="utf-8"?>
+<p:sld xmlns:a="http://schemas.openxmlformats.org/drawingml/2006/main" xmlns:p="http://schemas.openxmlformats.org/presentationml/2006/main" xmlns:r="http://schemas.openxmlformats.org/officeDocument/2006/relationships">
+  <p:cSld>
+    <p:bg>
+      <p:bgPr>
+        <a:solidFill>
+          <a:srgbClr val="FFFFFF"/>
+        </a:solidFill>
+        <a:effectLst/>
+      </p:bgPr>
+    </p:bg>
+    <p:spTree>
+      <p:nvGrpSpPr>
+        <p:cNvPr id="1" name=""/>
+        <p:cNvGrpSpPr/>
+        <p:nvPr/>
+      </p:nvGrpSpPr>
+      <p:grpSpPr/>
+      <p:sp>
+        <p:nvSpPr>
+          <p:cNvPr id="2" name="Rectangle 1"/>
+          <p:cNvSpPr/>
+          <p:nvPr/>
+        </p:nvSpPr>
+        <p:spPr>
+          <a:xfrm>
+            <a:off x="0" y="0"/>
+            <a:ext cx="9144000" cy="1097280"/>
+          </a:xfrm>
+          <a:prstGeom prst="rect">
+            <a:avLst/>
+          </a:prstGeom>
+          <a:solidFill>
+            <a:srgbClr val="002060"/>
+          </a:solidFill>
+          <a:ln>
+            <a:noFill/>
+          </a:ln>
+        </p:spPr>
+        <p:style>
+          <a:lnRef idx="1">
+            <a:schemeClr val="accent1"/>
+          </a:lnRef>
+          <a:fillRef idx="3">
+            <a:schemeClr val="accent1"/>
+          </a:fillRef>
+          <a:effectRef idx="2">
+            <a:schemeClr val="accent1"/>
+          </a:effectRef>
+          <a:fontRef idx="minor">
+            <a:schemeClr val="lt1"/>
+          </a:fontRef>
+        </p:style>
+        <p:txBody>
+          <a:bodyPr rtlCol="0" anchor="ctr" wrap="square" lIns="457200" tIns="137160"/>
+          <a:lstStyle/>
+          <a:p>
+            <a:pPr algn="l">
+              <a:defRPr sz="2800" b="1">
+                <a:solidFill>
+                  <a:srgbClr val="FFFFFF"/>
+                </a:solidFill>
+              </a:defRPr>
+            </a:pPr>
+            <a:r>
+              <a:t>Step 6: Reliability Analysis (Cronbach's Alpha)</a:t>
+            </a:r>
+          </a:p>
+        </p:txBody>
+      </p:sp>
+      <p:pic>
+        <p:nvPicPr>
+          <p:cNvPr id="3" name="Picture 2" descr="cronbach_alpha.png"/>
+          <p:cNvPicPr>
+            <a:picLocks noChangeAspect="1"/>
+          </p:cNvPicPr>
+          <p:nvPr/>
+        </p:nvPicPr>
+        <p:blipFill>
+          <a:blip r:embed="rId2"/>
+          <a:stretch>
+            <a:fillRect/>
+          </a:stretch>
+        </p:blipFill>
+        <p:spPr>
+          <a:xfrm>
+            <a:off x="182880" y="1371600"/>
+            <a:ext cx="5029200" cy="4114800"/>
+          </a:xfrm>
+          <a:prstGeom prst="rect">
+            <a:avLst/>
+          </a:prstGeom>
+        </p:spPr>
+      </p:pic>
+      <p:sp>
+        <p:nvSpPr>
+          <p:cNvPr id="4" name="TextBox 3"/>
+          <p:cNvSpPr txBox="1"/>
+          <p:nvPr/>
+        </p:nvSpPr>
+        <p:spPr>
+          <a:xfrm>
+            <a:off x="5303520" y="1371600"/>
+            <a:ext cx="3657600" cy="4572000"/>
+          </a:xfrm>
+          <a:prstGeom prst="rect">
+            <a:avLst/>
+          </a:prstGeom>
+          <a:noFill/>
+        </p:spPr>
+        <p:txBody>
+          <a:bodyPr wrap="square">
+            <a:spAutoFit/>
+          </a:bodyPr>
+          <a:lstStyle/>
+          <a:p>
+            <a:pPr>
+              <a:defRPr sz="1400" b="1">
+                <a:solidFill>
+                  <a:srgbClr val="002060"/>
+                </a:solidFill>
+              </a:defRPr>
+            </a:pPr>
+            <a:r>
+              <a:t>What is Cronbach's Alpha?</a:t>
+            </a:r>
+          </a:p>
+          <a:p>
+            <a:pPr>
+              <a:defRPr sz="1100">
+                <a:solidFill>
+                  <a:srgbClr val="323232"/>
+                </a:solidFill>
+              </a:defRPr>
+            </a:pPr>
+            <a:r>
+              <a:t>Measures how consistently the survey items within each dimension measure the same thing</a:t>
+            </a:r>
+          </a:p>
+          <a:p>
+            <a:pPr>
+              <a:defRPr sz="600"/>
+            </a:pPr>
+          </a:p>
+          <a:p>
+            <a:pPr>
+              <a:defRPr sz="1300" b="1">
+                <a:solidFill>
+                  <a:srgbClr val="00468C"/>
+                </a:solidFill>
+              </a:defRPr>
+            </a:pPr>
+            <a:r>
+              <a:t>Interpretation:</a:t>
+            </a:r>
+          </a:p>
+          <a:p>
+            <a:pPr>
+              <a:defRPr sz="1100">
+                <a:solidFill>
+                  <a:srgbClr val="323232"/>
+                </a:solidFill>
+              </a:defRPr>
+            </a:pPr>
+            <a:r>
+              <a:t>α &gt;= 0.70 = Acceptable reliability</a:t>
+            </a:r>
+          </a:p>
+          <a:p>
+            <a:pPr>
+              <a:defRPr sz="1100">
+                <a:solidFill>
+                  <a:srgbClr val="323232"/>
+                </a:solidFill>
+              </a:defRPr>
+            </a:pPr>
+            <a:r>
+              <a:t>α &gt;= 0.80 = Good reliability</a:t>
+            </a:r>
+          </a:p>
+          <a:p>
+            <a:pPr>
+              <a:defRPr sz="600"/>
+            </a:pPr>
+          </a:p>
+          <a:p>
+            <a:pPr>
+              <a:defRPr sz="1300" b="1">
+                <a:solidFill>
+                  <a:srgbClr val="008000"/>
+                </a:solidFill>
+              </a:defRPr>
+            </a:pPr>
+            <a:r>
+              <a:t>Results:</a:t>
+            </a:r>
+          </a:p>
+          <a:p>
+            <a:pPr>
+              <a:defRPr sz="1100">
+                <a:solidFill>
+                  <a:srgbClr val="323232"/>
+                </a:solidFill>
+              </a:defRPr>
+            </a:pPr>
+            <a:r>
+              <a:t>Overall scale: α = 0.81 (Good)</a:t>
+            </a:r>
+          </a:p>
+          <a:p>
+            <a:pPr>
+              <a:defRPr sz="1100">
+                <a:solidFill>
+                  <a:srgbClr val="323232"/>
+                </a:solidFill>
+              </a:defRPr>
+            </a:pPr>
+            <a:r>
+              <a:t>Range: 0.61 to 0.81</a:t>
+            </a:r>
+          </a:p>
+          <a:p>
+            <a:pPr>
+              <a:defRPr sz="600"/>
+            </a:pPr>
+          </a:p>
+          <a:p>
+            <a:pPr>
+              <a:defRPr sz="1200" b="1">
+                <a:solidFill>
+                  <a:srgbClr val="00468C"/>
+                </a:solidFill>
+              </a:defRPr>
+            </a:pPr>
+            <a:r>
+              <a:t>5 of 6 dimensions meet</a:t>
+            </a:r>
+          </a:p>
+          <a:p>
+            <a:pPr>
+              <a:defRPr sz="1200" b="1">
+                <a:solidFill>
+                  <a:srgbClr val="00468C"/>
+                </a:solidFill>
+              </a:defRPr>
+            </a:pPr>
+            <a:r>
+              <a:t>the 0.70 threshold</a:t>
+            </a:r>
+          </a:p>
+          <a:p>
+            <a:pPr>
+              <a:defRPr sz="600"/>
+            </a:pPr>
+          </a:p>
+          <a:p>
+            <a:pPr>
+              <a:defRPr sz="1000" b="1">
+                <a:solidFill>
+                  <a:srgbClr val="0070C0"/>
+                </a:solidFill>
+              </a:defRPr>
+            </a:pPr>
+            <a:r>
+              <a:t>Source: Tsounis &amp; Sarafis (2022)</a:t>
+            </a:r>
+          </a:p>
+        </p:txBody>
+      </p:sp>
+    </p:spTree>
+  </p:cSld>
+  <p:clrMapOvr>
+    <a:masterClrMapping/>
+  </p:clrMapOvr>
+</p:sld>
+</file>
+
+<file path=ppt/slides/slide16.xml><?xml version="1.0" encoding="utf-8"?>
+<p:sld xmlns:a="http://schemas.openxmlformats.org/drawingml/2006/main" xmlns:p="http://schemas.openxmlformats.org/presentationml/2006/main" xmlns:r="http://schemas.openxmlformats.org/officeDocument/2006/relationships">
+  <p:cSld>
+    <p:bg>
+      <p:bgPr>
+        <a:solidFill>
+          <a:srgbClr val="FFFFFF"/>
+        </a:solidFill>
+        <a:effectLst/>
+      </p:bgPr>
+    </p:bg>
+    <p:spTree>
+      <p:nvGrpSpPr>
+        <p:cNvPr id="1" name=""/>
+        <p:cNvGrpSpPr/>
+        <p:nvPr/>
+      </p:nvGrpSpPr>
+      <p:grpSpPr/>
+      <p:sp>
+        <p:nvSpPr>
+          <p:cNvPr id="2" name="Rectangle 1"/>
+          <p:cNvSpPr/>
+          <p:nvPr/>
+        </p:nvSpPr>
+        <p:spPr>
+          <a:xfrm>
+            <a:off x="0" y="0"/>
+            <a:ext cx="9144000" cy="1097280"/>
+          </a:xfrm>
+          <a:prstGeom prst="rect">
+            <a:avLst/>
+          </a:prstGeom>
+          <a:solidFill>
+            <a:srgbClr val="002060"/>
+          </a:solidFill>
+          <a:ln>
+            <a:noFill/>
+          </a:ln>
+        </p:spPr>
+        <p:style>
+          <a:lnRef idx="1">
+            <a:schemeClr val="accent1"/>
+          </a:lnRef>
+          <a:fillRef idx="3">
+            <a:schemeClr val="accent1"/>
+          </a:fillRef>
+          <a:effectRef idx="2">
+            <a:schemeClr val="accent1"/>
+          </a:effectRef>
+          <a:fontRef idx="minor">
+            <a:schemeClr val="lt1"/>
+          </a:fontRef>
+        </p:style>
+        <p:txBody>
+          <a:bodyPr rtlCol="0" anchor="ctr" wrap="square" lIns="457200" tIns="137160"/>
+          <a:lstStyle/>
+          <a:p>
+            <a:pPr algn="l">
+              <a:defRPr sz="2800" b="1">
+                <a:solidFill>
+                  <a:srgbClr val="FFFFFF"/>
+                </a:solidFill>
+              </a:defRPr>
+            </a:pPr>
+            <a:r>
+              <a:t>Step 7: CFA Model Fit Assessment</a:t>
             </a:r>
           </a:p>
         </p:txBody>
@@ -4826,7 +5687,7 @@
 </p:sld>
 </file>
 
-<file path=ppt/slides/slide14.xml><?xml version="1.0" encoding="utf-8"?>
+<file path=ppt/slides/slide17.xml><?xml version="1.0" encoding="utf-8"?>
 <p:sld xmlns:a="http://schemas.openxmlformats.org/drawingml/2006/main" xmlns:p="http://schemas.openxmlformats.org/presentationml/2006/main" xmlns:r="http://schemas.openxmlformats.org/officeDocument/2006/relationships">
   <p:cSld>
     <p:bg>
@@ -4891,7 +5752,7 @@
               </a:defRPr>
             </a:pPr>
             <a:r>
-              <a:t>Step 5: Variance Explained</a:t>
+              <a:t>Step 8: Variance Explained</a:t>
             </a:r>
           </a:p>
         </p:txBody>
@@ -4963,7 +5824,7 @@
 </p:sld>
 </file>
 
-<file path=ppt/slides/slide15.xml><?xml version="1.0" encoding="utf-8"?>
+<file path=ppt/slides/slide18.xml><?xml version="1.0" encoding="utf-8"?>
 <p:sld xmlns:a="http://schemas.openxmlformats.org/drawingml/2006/main" xmlns:p="http://schemas.openxmlformats.org/presentationml/2006/main" xmlns:r="http://schemas.openxmlformats.org/officeDocument/2006/relationships">
   <p:cSld>
     <p:bg>
@@ -5276,7 +6137,7 @@
 </p:sld>
 </file>
 
-<file path=ppt/slides/slide16.xml><?xml version="1.0" encoding="utf-8"?>
+<file path=ppt/slides/slide19.xml><?xml version="1.0" encoding="utf-8"?>
 <p:sld xmlns:a="http://schemas.openxmlformats.org/drawingml/2006/main" xmlns:p="http://schemas.openxmlformats.org/presentationml/2006/main" xmlns:r="http://schemas.openxmlformats.org/officeDocument/2006/relationships">
   <p:cSld>
     <p:bg>
@@ -5623,7 +6484,7 @@
 </p:sld>
 </file>
 
-<file path=ppt/slides/slide17.xml><?xml version="1.0" encoding="utf-8"?>
+<file path=ppt/slides/slide2.xml><?xml version="1.0" encoding="utf-8"?>
 <p:sld xmlns:a="http://schemas.openxmlformats.org/drawingml/2006/main" xmlns:p="http://schemas.openxmlformats.org/presentationml/2006/main" xmlns:r="http://schemas.openxmlformats.org/officeDocument/2006/relationships">
   <p:cSld>
     <p:bg>
@@ -5688,7 +6549,7 @@
               </a:defRPr>
             </a:pPr>
             <a:r>
-              <a:t>Factor Interpretation &amp; Business Implications</a:t>
+              <a:t>Agenda</a:t>
             </a:r>
           </a:p>
         </p:txBody>
@@ -5701,8 +6562,8 @@
         </p:nvSpPr>
         <p:spPr>
           <a:xfrm>
-            <a:off x="274320" y="1280160"/>
-            <a:ext cx="4389120" cy="5029200"/>
+            <a:off x="457200" y="1280160"/>
+            <a:ext cx="457200" cy="411480"/>
           </a:xfrm>
           <a:prstGeom prst="rect">
             <a:avLst/>
@@ -5710,155 +6571,20 @@
           <a:noFill/>
         </p:spPr>
         <p:txBody>
-          <a:bodyPr wrap="square">
+          <a:bodyPr wrap="none">
             <a:spAutoFit/>
           </a:bodyPr>
           <a:lstStyle/>
           <a:p>
             <a:pPr>
-              <a:defRPr sz="1500" b="1">
+              <a:defRPr sz="1400" b="1">
                 <a:solidFill>
                   <a:srgbClr val="002060"/>
                 </a:solidFill>
               </a:defRPr>
             </a:pPr>
             <a:r>
-              <a:t>What Each Factor Means for Organizations:</a:t>
-            </a:r>
-          </a:p>
-          <a:p>
-            <a:pPr>
-              <a:defRPr sz="600"/>
-            </a:pPr>
-          </a:p>
-          <a:p>
-            <a:pPr>
-              <a:defRPr sz="1400" b="1">
-                <a:solidFill>
-                  <a:srgbClr val="004080"/>
-                </a:solidFill>
-              </a:defRPr>
-            </a:pPr>
-            <a:r>
-              <a:t>Factor 1: Benefits &amp; Salary</a:t>
-            </a:r>
-          </a:p>
-          <a:p>
-            <a:pPr>
-              <a:defRPr sz="1200">
-                <a:solidFill>
-                  <a:srgbClr val="323232"/>
-                </a:solidFill>
-              </a:defRPr>
-            </a:pPr>
-            <a:r>
-              <a:t>Largest factor - explains the most variance</a:t>
-            </a:r>
-          </a:p>
-          <a:p>
-            <a:pPr>
-              <a:defRPr sz="1200">
-                <a:solidFill>
-                  <a:srgbClr val="323232"/>
-                </a:solidFill>
-              </a:defRPr>
-            </a:pPr>
-            <a:r>
-              <a:t>Fair compensation is the foundation of satisfaction</a:t>
-            </a:r>
-          </a:p>
-          <a:p>
-            <a:pPr>
-              <a:defRPr sz="1200">
-                <a:solidFill>
-                  <a:srgbClr val="323232"/>
-                </a:solidFill>
-              </a:defRPr>
-            </a:pPr>
-            <a:r>
-              <a:t>Organizations must ensure competitive pay structures</a:t>
-            </a:r>
-          </a:p>
-          <a:p>
-            <a:pPr>
-              <a:defRPr sz="600"/>
-            </a:pPr>
-          </a:p>
-          <a:p>
-            <a:pPr>
-              <a:defRPr sz="1400" b="1">
-                <a:solidFill>
-                  <a:srgbClr val="004080"/>
-                </a:solidFill>
-              </a:defRPr>
-            </a:pPr>
-            <a:r>
-              <a:t>Factor 2: Management's Attitude</a:t>
-            </a:r>
-          </a:p>
-          <a:p>
-            <a:pPr>
-              <a:defRPr sz="1200">
-                <a:solidFill>
-                  <a:srgbClr val="323232"/>
-                </a:solidFill>
-              </a:defRPr>
-            </a:pPr>
-            <a:r>
-              <a:t>How leadership treats employees matters greatly</a:t>
-            </a:r>
-          </a:p>
-          <a:p>
-            <a:pPr>
-              <a:defRPr sz="1200">
-                <a:solidFill>
-                  <a:srgbClr val="323232"/>
-                </a:solidFill>
-              </a:defRPr>
-            </a:pPr>
-            <a:r>
-              <a:t>Respectful, supportive management boosts morale</a:t>
-            </a:r>
-          </a:p>
-          <a:p>
-            <a:pPr>
-              <a:defRPr sz="600"/>
-            </a:pPr>
-          </a:p>
-          <a:p>
-            <a:pPr>
-              <a:defRPr sz="1400" b="1">
-                <a:solidFill>
-                  <a:srgbClr val="004080"/>
-                </a:solidFill>
-              </a:defRPr>
-            </a:pPr>
-            <a:r>
-              <a:t>Factor 3: Supervision</a:t>
-            </a:r>
-          </a:p>
-          <a:p>
-            <a:pPr>
-              <a:defRPr sz="1200">
-                <a:solidFill>
-                  <a:srgbClr val="323232"/>
-                </a:solidFill>
-              </a:defRPr>
-            </a:pPr>
-            <a:r>
-              <a:t>Quality of direct supervisors impacts daily work experience</a:t>
-            </a:r>
-          </a:p>
-          <a:p>
-            <a:pPr>
-              <a:defRPr sz="1200">
-                <a:solidFill>
-                  <a:srgbClr val="323232"/>
-                </a:solidFill>
-              </a:defRPr>
-            </a:pPr>
-            <a:r>
-              <a:t>Good supervisors provide guidance without micromanaging</a:t>
+              <a:t>1.</a:t>
             </a:r>
           </a:p>
         </p:txBody>
@@ -5871,8 +6597,8 @@
         </p:nvSpPr>
         <p:spPr>
           <a:xfrm>
-            <a:off x="4846320" y="1280160"/>
-            <a:ext cx="4114800" cy="5029200"/>
+            <a:off x="914400" y="1280160"/>
+            <a:ext cx="3657600" cy="411480"/>
           </a:xfrm>
           <a:prstGeom prst="rect">
             <a:avLst/>
@@ -5880,181 +6606,1105 @@
           <a:noFill/>
         </p:spPr>
         <p:txBody>
-          <a:bodyPr wrap="square">
+          <a:bodyPr wrap="none">
             <a:spAutoFit/>
           </a:bodyPr>
           <a:lstStyle/>
           <a:p>
             <a:pPr>
-              <a:defRPr sz="600" b="0">
-                <a:solidFill>
-                  <a:srgbClr val="323232"/>
-                </a:solidFill>
-              </a:defRPr>
-            </a:pPr>
-          </a:p>
-          <a:p>
-            <a:pPr>
-              <a:defRPr sz="600"/>
-            </a:pPr>
-          </a:p>
-          <a:p>
-            <a:pPr>
               <a:defRPr sz="1400" b="1">
                 <a:solidFill>
-                  <a:srgbClr val="004080"/>
-                </a:solidFill>
-              </a:defRPr>
-            </a:pPr>
-            <a:r>
-              <a:t>Factor 4: Communication</a:t>
-            </a:r>
-          </a:p>
-          <a:p>
-            <a:pPr>
-              <a:defRPr sz="1200">
-                <a:solidFill>
-                  <a:srgbClr val="323232"/>
-                </a:solidFill>
-              </a:defRPr>
-            </a:pPr>
-            <a:r>
-              <a:t>Clear information flow reduces confusion</a:t>
-            </a:r>
-          </a:p>
-          <a:p>
-            <a:pPr>
-              <a:defRPr sz="1200">
-                <a:solidFill>
-                  <a:srgbClr val="323232"/>
-                </a:solidFill>
-              </a:defRPr>
-            </a:pPr>
-            <a:r>
-              <a:t>Employees need to feel informed about decisions</a:t>
-            </a:r>
-          </a:p>
-          <a:p>
-            <a:pPr>
-              <a:defRPr sz="600"/>
-            </a:pPr>
-          </a:p>
+                  <a:srgbClr val="00468C"/>
+                </a:solidFill>
+              </a:defRPr>
+            </a:pPr>
+            <a:r>
+              <a:t>Problem Statement</a:t>
+            </a:r>
+          </a:p>
+        </p:txBody>
+      </p:sp>
+      <p:sp>
+        <p:nvSpPr>
+          <p:cNvPr id="5" name="TextBox 4"/>
+          <p:cNvSpPr txBox="1"/>
+          <p:nvPr/>
+        </p:nvSpPr>
+        <p:spPr>
+          <a:xfrm>
+            <a:off x="4754880" y="1280160"/>
+            <a:ext cx="4114800" cy="411480"/>
+          </a:xfrm>
+          <a:prstGeom prst="rect">
+            <a:avLst/>
+          </a:prstGeom>
+          <a:noFill/>
+        </p:spPr>
+        <p:txBody>
+          <a:bodyPr wrap="none">
+            <a:spAutoFit/>
+          </a:bodyPr>
+          <a:lstStyle/>
+          <a:p>
+            <a:pPr>
+              <a:defRPr sz="1300">
+                <a:solidFill>
+                  <a:srgbClr val="323232"/>
+                </a:solidFill>
+              </a:defRPr>
+            </a:pPr>
+            <a:r>
+              <a:t>Why Study Job Satisfaction?</a:t>
+            </a:r>
+          </a:p>
+        </p:txBody>
+      </p:sp>
+      <p:sp>
+        <p:nvSpPr>
+          <p:cNvPr id="6" name="TextBox 5"/>
+          <p:cNvSpPr txBox="1"/>
+          <p:nvPr/>
+        </p:nvSpPr>
+        <p:spPr>
+          <a:xfrm>
+            <a:off x="457200" y="1737360"/>
+            <a:ext cx="457200" cy="411480"/>
+          </a:xfrm>
+          <a:prstGeom prst="rect">
+            <a:avLst/>
+          </a:prstGeom>
+          <a:noFill/>
+        </p:spPr>
+        <p:txBody>
+          <a:bodyPr wrap="none">
+            <a:spAutoFit/>
+          </a:bodyPr>
+          <a:lstStyle/>
           <a:p>
             <a:pPr>
               <a:defRPr sz="1400" b="1">
                 <a:solidFill>
-                  <a:srgbClr val="004080"/>
-                </a:solidFill>
-              </a:defRPr>
-            </a:pPr>
-            <a:r>
-              <a:t>Factor 5: Nature of Work</a:t>
-            </a:r>
-          </a:p>
-          <a:p>
-            <a:pPr>
-              <a:defRPr sz="1200">
-                <a:solidFill>
-                  <a:srgbClr val="323232"/>
-                </a:solidFill>
-              </a:defRPr>
-            </a:pPr>
-            <a:r>
-              <a:t>Meaningful, interesting work increases engagement</a:t>
-            </a:r>
-          </a:p>
-          <a:p>
-            <a:pPr>
-              <a:defRPr sz="1200">
-                <a:solidFill>
-                  <a:srgbClr val="323232"/>
-                </a:solidFill>
-              </a:defRPr>
-            </a:pPr>
-            <a:r>
-              <a:t>Task variety and autonomy are important</a:t>
-            </a:r>
-          </a:p>
-          <a:p>
-            <a:pPr>
-              <a:defRPr sz="600"/>
-            </a:pPr>
-          </a:p>
+                  <a:srgbClr val="002060"/>
+                </a:solidFill>
+              </a:defRPr>
+            </a:pPr>
+            <a:r>
+              <a:t>2.</a:t>
+            </a:r>
+          </a:p>
+        </p:txBody>
+      </p:sp>
+      <p:sp>
+        <p:nvSpPr>
+          <p:cNvPr id="7" name="TextBox 6"/>
+          <p:cNvSpPr txBox="1"/>
+          <p:nvPr/>
+        </p:nvSpPr>
+        <p:spPr>
+          <a:xfrm>
+            <a:off x="914400" y="1737360"/>
+            <a:ext cx="3657600" cy="411480"/>
+          </a:xfrm>
+          <a:prstGeom prst="rect">
+            <a:avLst/>
+          </a:prstGeom>
+          <a:noFill/>
+        </p:spPr>
+        <p:txBody>
+          <a:bodyPr wrap="none">
+            <a:spAutoFit/>
+          </a:bodyPr>
+          <a:lstStyle/>
           <a:p>
             <a:pPr>
               <a:defRPr sz="1400" b="1">
                 <a:solidFill>
-                  <a:srgbClr val="004080"/>
-                </a:solidFill>
-              </a:defRPr>
-            </a:pPr>
-            <a:r>
-              <a:t>Factor 6: Colleagues' Support</a:t>
-            </a:r>
-          </a:p>
-          <a:p>
-            <a:pPr>
-              <a:defRPr sz="1200">
-                <a:solidFill>
-                  <a:srgbClr val="323232"/>
-                </a:solidFill>
-              </a:defRPr>
-            </a:pPr>
-            <a:r>
-              <a:t>Positive coworker relationships create a supportive environment</a:t>
-            </a:r>
-          </a:p>
-          <a:p>
-            <a:pPr>
-              <a:defRPr sz="1200">
-                <a:solidFill>
-                  <a:srgbClr val="323232"/>
-                </a:solidFill>
-              </a:defRPr>
-            </a:pPr>
-            <a:r>
-              <a:t>Teamwork and collaboration drive satisfaction</a:t>
-            </a:r>
-          </a:p>
-          <a:p>
-            <a:pPr>
-              <a:defRPr sz="600"/>
-            </a:pPr>
-          </a:p>
+                  <a:srgbClr val="00468C"/>
+                </a:solidFill>
+              </a:defRPr>
+            </a:pPr>
+            <a:r>
+              <a:t>Article Information</a:t>
+            </a:r>
+          </a:p>
+        </p:txBody>
+      </p:sp>
+      <p:sp>
+        <p:nvSpPr>
+          <p:cNvPr id="8" name="TextBox 7"/>
+          <p:cNvSpPr txBox="1"/>
+          <p:nvPr/>
+        </p:nvSpPr>
+        <p:spPr>
+          <a:xfrm>
+            <a:off x="4754880" y="1737360"/>
+            <a:ext cx="4114800" cy="411480"/>
+          </a:xfrm>
+          <a:prstGeom prst="rect">
+            <a:avLst/>
+          </a:prstGeom>
+          <a:noFill/>
+        </p:spPr>
+        <p:txBody>
+          <a:bodyPr wrap="none">
+            <a:spAutoFit/>
+          </a:bodyPr>
+          <a:lstStyle/>
+          <a:p>
+            <a:pPr>
+              <a:defRPr sz="1300">
+                <a:solidFill>
+                  <a:srgbClr val="323232"/>
+                </a:solidFill>
+              </a:defRPr>
+            </a:pPr>
+            <a:r>
+              <a:t>Key Research Papers</a:t>
+            </a:r>
+          </a:p>
+        </p:txBody>
+      </p:sp>
+      <p:sp>
+        <p:nvSpPr>
+          <p:cNvPr id="9" name="TextBox 8"/>
+          <p:cNvSpPr txBox="1"/>
+          <p:nvPr/>
+        </p:nvSpPr>
+        <p:spPr>
+          <a:xfrm>
+            <a:off x="457200" y="2194560"/>
+            <a:ext cx="457200" cy="411480"/>
+          </a:xfrm>
+          <a:prstGeom prst="rect">
+            <a:avLst/>
+          </a:prstGeom>
+          <a:noFill/>
+        </p:spPr>
+        <p:txBody>
+          <a:bodyPr wrap="none">
+            <a:spAutoFit/>
+          </a:bodyPr>
+          <a:lstStyle/>
           <a:p>
             <a:pPr>
               <a:defRPr sz="1400" b="1">
                 <a:solidFill>
-                  <a:srgbClr val="008000"/>
-                </a:solidFill>
-              </a:defRPr>
-            </a:pPr>
-            <a:r>
-              <a:t>Actionable Insight:</a:t>
-            </a:r>
-          </a:p>
-          <a:p>
-            <a:pPr>
-              <a:defRPr sz="1200">
-                <a:solidFill>
-                  <a:srgbClr val="323232"/>
-                </a:solidFill>
-              </a:defRPr>
-            </a:pPr>
-            <a:r>
-              <a:t>Organizations should invest in all 6 areas,</a:t>
-            </a:r>
-          </a:p>
-          <a:p>
-            <a:pPr>
-              <a:defRPr sz="1200">
-                <a:solidFill>
-                  <a:srgbClr val="323232"/>
-                </a:solidFill>
-              </a:defRPr>
-            </a:pPr>
-            <a:r>
-              <a:t>but prioritize pay fairness and management quality</a:t>
+                  <a:srgbClr val="002060"/>
+                </a:solidFill>
+              </a:defRPr>
+            </a:pPr>
+            <a:r>
+              <a:t>3.</a:t>
+            </a:r>
+          </a:p>
+        </p:txBody>
+      </p:sp>
+      <p:sp>
+        <p:nvSpPr>
+          <p:cNvPr id="10" name="TextBox 9"/>
+          <p:cNvSpPr txBox="1"/>
+          <p:nvPr/>
+        </p:nvSpPr>
+        <p:spPr>
+          <a:xfrm>
+            <a:off x="914400" y="2194560"/>
+            <a:ext cx="3657600" cy="411480"/>
+          </a:xfrm>
+          <a:prstGeom prst="rect">
+            <a:avLst/>
+          </a:prstGeom>
+          <a:noFill/>
+        </p:spPr>
+        <p:txBody>
+          <a:bodyPr wrap="none">
+            <a:spAutoFit/>
+          </a:bodyPr>
+          <a:lstStyle/>
+          <a:p>
+            <a:pPr>
+              <a:defRPr sz="1400" b="1">
+                <a:solidFill>
+                  <a:srgbClr val="00468C"/>
+                </a:solidFill>
+              </a:defRPr>
+            </a:pPr>
+            <a:r>
+              <a:t>Factor Analysis Overview</a:t>
+            </a:r>
+          </a:p>
+        </p:txBody>
+      </p:sp>
+      <p:sp>
+        <p:nvSpPr>
+          <p:cNvPr id="11" name="TextBox 10"/>
+          <p:cNvSpPr txBox="1"/>
+          <p:nvPr/>
+        </p:nvSpPr>
+        <p:spPr>
+          <a:xfrm>
+            <a:off x="4754880" y="2194560"/>
+            <a:ext cx="4114800" cy="411480"/>
+          </a:xfrm>
+          <a:prstGeom prst="rect">
+            <a:avLst/>
+          </a:prstGeom>
+          <a:noFill/>
+        </p:spPr>
+        <p:txBody>
+          <a:bodyPr wrap="none">
+            <a:spAutoFit/>
+          </a:bodyPr>
+          <a:lstStyle/>
+          <a:p>
+            <a:pPr>
+              <a:defRPr sz="1300">
+                <a:solidFill>
+                  <a:srgbClr val="323232"/>
+                </a:solidFill>
+              </a:defRPr>
+            </a:pPr>
+            <a:r>
+              <a:t>What is Factor Analysis?</a:t>
+            </a:r>
+          </a:p>
+        </p:txBody>
+      </p:sp>
+      <p:sp>
+        <p:nvSpPr>
+          <p:cNvPr id="12" name="TextBox 11"/>
+          <p:cNvSpPr txBox="1"/>
+          <p:nvPr/>
+        </p:nvSpPr>
+        <p:spPr>
+          <a:xfrm>
+            <a:off x="457200" y="2651760"/>
+            <a:ext cx="457200" cy="411480"/>
+          </a:xfrm>
+          <a:prstGeom prst="rect">
+            <a:avLst/>
+          </a:prstGeom>
+          <a:noFill/>
+        </p:spPr>
+        <p:txBody>
+          <a:bodyPr wrap="none">
+            <a:spAutoFit/>
+          </a:bodyPr>
+          <a:lstStyle/>
+          <a:p>
+            <a:pPr>
+              <a:defRPr sz="1400" b="1">
+                <a:solidFill>
+                  <a:srgbClr val="002060"/>
+                </a:solidFill>
+              </a:defRPr>
+            </a:pPr>
+            <a:r>
+              <a:t>4.</a:t>
+            </a:r>
+          </a:p>
+        </p:txBody>
+      </p:sp>
+      <p:sp>
+        <p:nvSpPr>
+          <p:cNvPr id="13" name="TextBox 12"/>
+          <p:cNvSpPr txBox="1"/>
+          <p:nvPr/>
+        </p:nvSpPr>
+        <p:spPr>
+          <a:xfrm>
+            <a:off x="914400" y="2651760"/>
+            <a:ext cx="3657600" cy="411480"/>
+          </a:xfrm>
+          <a:prstGeom prst="rect">
+            <a:avLst/>
+          </a:prstGeom>
+          <a:noFill/>
+        </p:spPr>
+        <p:txBody>
+          <a:bodyPr wrap="none">
+            <a:spAutoFit/>
+          </a:bodyPr>
+          <a:lstStyle/>
+          <a:p>
+            <a:pPr>
+              <a:defRPr sz="1400" b="1">
+                <a:solidFill>
+                  <a:srgbClr val="00468C"/>
+                </a:solidFill>
+              </a:defRPr>
+            </a:pPr>
+            <a:r>
+              <a:t>FA Procedure</a:t>
+            </a:r>
+          </a:p>
+        </p:txBody>
+      </p:sp>
+      <p:sp>
+        <p:nvSpPr>
+          <p:cNvPr id="14" name="TextBox 13"/>
+          <p:cNvSpPr txBox="1"/>
+          <p:nvPr/>
+        </p:nvSpPr>
+        <p:spPr>
+          <a:xfrm>
+            <a:off x="4754880" y="2651760"/>
+            <a:ext cx="4114800" cy="411480"/>
+          </a:xfrm>
+          <a:prstGeom prst="rect">
+            <a:avLst/>
+          </a:prstGeom>
+          <a:noFill/>
+        </p:spPr>
+        <p:txBody>
+          <a:bodyPr wrap="none">
+            <a:spAutoFit/>
+          </a:bodyPr>
+          <a:lstStyle/>
+          <a:p>
+            <a:pPr>
+              <a:defRPr sz="1300">
+                <a:solidFill>
+                  <a:srgbClr val="323232"/>
+                </a:solidFill>
+              </a:defRPr>
+            </a:pPr>
+            <a:r>
+              <a:t>Step-by-Step Methodology</a:t>
+            </a:r>
+          </a:p>
+        </p:txBody>
+      </p:sp>
+      <p:sp>
+        <p:nvSpPr>
+          <p:cNvPr id="15" name="TextBox 14"/>
+          <p:cNvSpPr txBox="1"/>
+          <p:nvPr/>
+        </p:nvSpPr>
+        <p:spPr>
+          <a:xfrm>
+            <a:off x="457200" y="3108960"/>
+            <a:ext cx="457200" cy="411480"/>
+          </a:xfrm>
+          <a:prstGeom prst="rect">
+            <a:avLst/>
+          </a:prstGeom>
+          <a:noFill/>
+        </p:spPr>
+        <p:txBody>
+          <a:bodyPr wrap="none">
+            <a:spAutoFit/>
+          </a:bodyPr>
+          <a:lstStyle/>
+          <a:p>
+            <a:pPr>
+              <a:defRPr sz="1400" b="1">
+                <a:solidFill>
+                  <a:srgbClr val="002060"/>
+                </a:solidFill>
+              </a:defRPr>
+            </a:pPr>
+            <a:r>
+              <a:t>5.</a:t>
+            </a:r>
+          </a:p>
+        </p:txBody>
+      </p:sp>
+      <p:sp>
+        <p:nvSpPr>
+          <p:cNvPr id="16" name="TextBox 15"/>
+          <p:cNvSpPr txBox="1"/>
+          <p:nvPr/>
+        </p:nvSpPr>
+        <p:spPr>
+          <a:xfrm>
+            <a:off x="914400" y="3108960"/>
+            <a:ext cx="3657600" cy="411480"/>
+          </a:xfrm>
+          <a:prstGeom prst="rect">
+            <a:avLst/>
+          </a:prstGeom>
+          <a:noFill/>
+        </p:spPr>
+        <p:txBody>
+          <a:bodyPr wrap="none">
+            <a:spAutoFit/>
+          </a:bodyPr>
+          <a:lstStyle/>
+          <a:p>
+            <a:pPr>
+              <a:defRPr sz="1400" b="1">
+                <a:solidFill>
+                  <a:srgbClr val="00468C"/>
+                </a:solidFill>
+              </a:defRPr>
+            </a:pPr>
+            <a:r>
+              <a:t>Case Study</a:t>
+            </a:r>
+          </a:p>
+        </p:txBody>
+      </p:sp>
+      <p:sp>
+        <p:nvSpPr>
+          <p:cNvPr id="17" name="TextBox 16"/>
+          <p:cNvSpPr txBox="1"/>
+          <p:nvPr/>
+        </p:nvSpPr>
+        <p:spPr>
+          <a:xfrm>
+            <a:off x="4754880" y="3108960"/>
+            <a:ext cx="4114800" cy="411480"/>
+          </a:xfrm>
+          <a:prstGeom prst="rect">
+            <a:avLst/>
+          </a:prstGeom>
+          <a:noFill/>
+        </p:spPr>
+        <p:txBody>
+          <a:bodyPr wrap="none">
+            <a:spAutoFit/>
+          </a:bodyPr>
+          <a:lstStyle/>
+          <a:p>
+            <a:pPr>
+              <a:defRPr sz="1300">
+                <a:solidFill>
+                  <a:srgbClr val="323232"/>
+                </a:solidFill>
+              </a:defRPr>
+            </a:pPr>
+            <a:r>
+              <a:t>Job Satisfaction in Healthcare</a:t>
+            </a:r>
+          </a:p>
+        </p:txBody>
+      </p:sp>
+      <p:sp>
+        <p:nvSpPr>
+          <p:cNvPr id="18" name="TextBox 17"/>
+          <p:cNvSpPr txBox="1"/>
+          <p:nvPr/>
+        </p:nvSpPr>
+        <p:spPr>
+          <a:xfrm>
+            <a:off x="457200" y="3566160"/>
+            <a:ext cx="457200" cy="411480"/>
+          </a:xfrm>
+          <a:prstGeom prst="rect">
+            <a:avLst/>
+          </a:prstGeom>
+          <a:noFill/>
+        </p:spPr>
+        <p:txBody>
+          <a:bodyPr wrap="none">
+            <a:spAutoFit/>
+          </a:bodyPr>
+          <a:lstStyle/>
+          <a:p>
+            <a:pPr>
+              <a:defRPr sz="1400" b="1">
+                <a:solidFill>
+                  <a:srgbClr val="002060"/>
+                </a:solidFill>
+              </a:defRPr>
+            </a:pPr>
+            <a:r>
+              <a:t>6.</a:t>
+            </a:r>
+          </a:p>
+        </p:txBody>
+      </p:sp>
+      <p:sp>
+        <p:nvSpPr>
+          <p:cNvPr id="19" name="TextBox 18"/>
+          <p:cNvSpPr txBox="1"/>
+          <p:nvPr/>
+        </p:nvSpPr>
+        <p:spPr>
+          <a:xfrm>
+            <a:off x="914400" y="3566160"/>
+            <a:ext cx="3657600" cy="411480"/>
+          </a:xfrm>
+          <a:prstGeom prst="rect">
+            <a:avLst/>
+          </a:prstGeom>
+          <a:noFill/>
+        </p:spPr>
+        <p:txBody>
+          <a:bodyPr wrap="none">
+            <a:spAutoFit/>
+          </a:bodyPr>
+          <a:lstStyle/>
+          <a:p>
+            <a:pPr>
+              <a:defRPr sz="1400" b="1">
+                <a:solidFill>
+                  <a:srgbClr val="00468C"/>
+                </a:solidFill>
+              </a:defRPr>
+            </a:pPr>
+            <a:r>
+              <a:t>Spector's JSS Framework</a:t>
+            </a:r>
+          </a:p>
+        </p:txBody>
+      </p:sp>
+      <p:sp>
+        <p:nvSpPr>
+          <p:cNvPr id="20" name="TextBox 19"/>
+          <p:cNvSpPr txBox="1"/>
+          <p:nvPr/>
+        </p:nvSpPr>
+        <p:spPr>
+          <a:xfrm>
+            <a:off x="4754880" y="3566160"/>
+            <a:ext cx="4114800" cy="411480"/>
+          </a:xfrm>
+          <a:prstGeom prst="rect">
+            <a:avLst/>
+          </a:prstGeom>
+          <a:noFill/>
+        </p:spPr>
+        <p:txBody>
+          <a:bodyPr wrap="none">
+            <a:spAutoFit/>
+          </a:bodyPr>
+          <a:lstStyle/>
+          <a:p>
+            <a:pPr>
+              <a:defRPr sz="1300">
+                <a:solidFill>
+                  <a:srgbClr val="323232"/>
+                </a:solidFill>
+              </a:defRPr>
+            </a:pPr>
+            <a:r>
+              <a:t>9 Dimensions of Satisfaction</a:t>
+            </a:r>
+          </a:p>
+        </p:txBody>
+      </p:sp>
+      <p:sp>
+        <p:nvSpPr>
+          <p:cNvPr id="21" name="TextBox 20"/>
+          <p:cNvSpPr txBox="1"/>
+          <p:nvPr/>
+        </p:nvSpPr>
+        <p:spPr>
+          <a:xfrm>
+            <a:off x="457200" y="4023360"/>
+            <a:ext cx="457200" cy="411480"/>
+          </a:xfrm>
+          <a:prstGeom prst="rect">
+            <a:avLst/>
+          </a:prstGeom>
+          <a:noFill/>
+        </p:spPr>
+        <p:txBody>
+          <a:bodyPr wrap="none">
+            <a:spAutoFit/>
+          </a:bodyPr>
+          <a:lstStyle/>
+          <a:p>
+            <a:pPr>
+              <a:defRPr sz="1400" b="1">
+                <a:solidFill>
+                  <a:srgbClr val="002060"/>
+                </a:solidFill>
+              </a:defRPr>
+            </a:pPr>
+            <a:r>
+              <a:t>7.</a:t>
+            </a:r>
+          </a:p>
+        </p:txBody>
+      </p:sp>
+      <p:sp>
+        <p:nvSpPr>
+          <p:cNvPr id="22" name="TextBox 21"/>
+          <p:cNvSpPr txBox="1"/>
+          <p:nvPr/>
+        </p:nvSpPr>
+        <p:spPr>
+          <a:xfrm>
+            <a:off x="914400" y="4023360"/>
+            <a:ext cx="3657600" cy="411480"/>
+          </a:xfrm>
+          <a:prstGeom prst="rect">
+            <a:avLst/>
+          </a:prstGeom>
+          <a:noFill/>
+        </p:spPr>
+        <p:txBody>
+          <a:bodyPr wrap="none">
+            <a:spAutoFit/>
+          </a:bodyPr>
+          <a:lstStyle/>
+          <a:p>
+            <a:pPr>
+              <a:defRPr sz="1400" b="1">
+                <a:solidFill>
+                  <a:srgbClr val="00468C"/>
+                </a:solidFill>
+              </a:defRPr>
+            </a:pPr>
+            <a:r>
+              <a:t>EFA &amp; CFA Results</a:t>
+            </a:r>
+          </a:p>
+        </p:txBody>
+      </p:sp>
+      <p:sp>
+        <p:nvSpPr>
+          <p:cNvPr id="23" name="TextBox 22"/>
+          <p:cNvSpPr txBox="1"/>
+          <p:nvPr/>
+        </p:nvSpPr>
+        <p:spPr>
+          <a:xfrm>
+            <a:off x="4754880" y="4023360"/>
+            <a:ext cx="4114800" cy="411480"/>
+          </a:xfrm>
+          <a:prstGeom prst="rect">
+            <a:avLst/>
+          </a:prstGeom>
+          <a:noFill/>
+        </p:spPr>
+        <p:txBody>
+          <a:bodyPr wrap="none">
+            <a:spAutoFit/>
+          </a:bodyPr>
+          <a:lstStyle/>
+          <a:p>
+            <a:pPr>
+              <a:defRPr sz="1300">
+                <a:solidFill>
+                  <a:srgbClr val="323232"/>
+                </a:solidFill>
+              </a:defRPr>
+            </a:pPr>
+            <a:r>
+              <a:t>Statistical Findings</a:t>
+            </a:r>
+          </a:p>
+        </p:txBody>
+      </p:sp>
+      <p:sp>
+        <p:nvSpPr>
+          <p:cNvPr id="24" name="TextBox 23"/>
+          <p:cNvSpPr txBox="1"/>
+          <p:nvPr/>
+        </p:nvSpPr>
+        <p:spPr>
+          <a:xfrm>
+            <a:off x="457200" y="4480560"/>
+            <a:ext cx="457200" cy="411480"/>
+          </a:xfrm>
+          <a:prstGeom prst="rect">
+            <a:avLst/>
+          </a:prstGeom>
+          <a:noFill/>
+        </p:spPr>
+        <p:txBody>
+          <a:bodyPr wrap="none">
+            <a:spAutoFit/>
+          </a:bodyPr>
+          <a:lstStyle/>
+          <a:p>
+            <a:pPr>
+              <a:defRPr sz="1400" b="1">
+                <a:solidFill>
+                  <a:srgbClr val="002060"/>
+                </a:solidFill>
+              </a:defRPr>
+            </a:pPr>
+            <a:r>
+              <a:t>8.</a:t>
+            </a:r>
+          </a:p>
+        </p:txBody>
+      </p:sp>
+      <p:sp>
+        <p:nvSpPr>
+          <p:cNvPr id="25" name="TextBox 24"/>
+          <p:cNvSpPr txBox="1"/>
+          <p:nvPr/>
+        </p:nvSpPr>
+        <p:spPr>
+          <a:xfrm>
+            <a:off x="914400" y="4480560"/>
+            <a:ext cx="3657600" cy="411480"/>
+          </a:xfrm>
+          <a:prstGeom prst="rect">
+            <a:avLst/>
+          </a:prstGeom>
+          <a:noFill/>
+        </p:spPr>
+        <p:txBody>
+          <a:bodyPr wrap="none">
+            <a:spAutoFit/>
+          </a:bodyPr>
+          <a:lstStyle/>
+          <a:p>
+            <a:pPr>
+              <a:defRPr sz="1400" b="1">
+                <a:solidFill>
+                  <a:srgbClr val="00468C"/>
+                </a:solidFill>
+              </a:defRPr>
+            </a:pPr>
+            <a:r>
+              <a:t>Supporting Study</a:t>
+            </a:r>
+          </a:p>
+        </p:txBody>
+      </p:sp>
+      <p:sp>
+        <p:nvSpPr>
+          <p:cNvPr id="26" name="TextBox 25"/>
+          <p:cNvSpPr txBox="1"/>
+          <p:nvPr/>
+        </p:nvSpPr>
+        <p:spPr>
+          <a:xfrm>
+            <a:off x="4754880" y="4480560"/>
+            <a:ext cx="4114800" cy="411480"/>
+          </a:xfrm>
+          <a:prstGeom prst="rect">
+            <a:avLst/>
+          </a:prstGeom>
+          <a:noFill/>
+        </p:spPr>
+        <p:txBody>
+          <a:bodyPr wrap="none">
+            <a:spAutoFit/>
+          </a:bodyPr>
+          <a:lstStyle/>
+          <a:p>
+            <a:pPr>
+              <a:defRPr sz="1300">
+                <a:solidFill>
+                  <a:srgbClr val="323232"/>
+                </a:solidFill>
+              </a:defRPr>
+            </a:pPr>
+            <a:r>
+              <a:t>Satisfaction &amp; Work Performance</a:t>
+            </a:r>
+          </a:p>
+        </p:txBody>
+      </p:sp>
+      <p:sp>
+        <p:nvSpPr>
+          <p:cNvPr id="27" name="TextBox 26"/>
+          <p:cNvSpPr txBox="1"/>
+          <p:nvPr/>
+        </p:nvSpPr>
+        <p:spPr>
+          <a:xfrm>
+            <a:off x="457200" y="4937760"/>
+            <a:ext cx="457200" cy="411480"/>
+          </a:xfrm>
+          <a:prstGeom prst="rect">
+            <a:avLst/>
+          </a:prstGeom>
+          <a:noFill/>
+        </p:spPr>
+        <p:txBody>
+          <a:bodyPr wrap="none">
+            <a:spAutoFit/>
+          </a:bodyPr>
+          <a:lstStyle/>
+          <a:p>
+            <a:pPr>
+              <a:defRPr sz="1400" b="1">
+                <a:solidFill>
+                  <a:srgbClr val="002060"/>
+                </a:solidFill>
+              </a:defRPr>
+            </a:pPr>
+            <a:r>
+              <a:t>9.</a:t>
+            </a:r>
+          </a:p>
+        </p:txBody>
+      </p:sp>
+      <p:sp>
+        <p:nvSpPr>
+          <p:cNvPr id="28" name="TextBox 27"/>
+          <p:cNvSpPr txBox="1"/>
+          <p:nvPr/>
+        </p:nvSpPr>
+        <p:spPr>
+          <a:xfrm>
+            <a:off x="914400" y="4937760"/>
+            <a:ext cx="3657600" cy="411480"/>
+          </a:xfrm>
+          <a:prstGeom prst="rect">
+            <a:avLst/>
+          </a:prstGeom>
+          <a:noFill/>
+        </p:spPr>
+        <p:txBody>
+          <a:bodyPr wrap="none">
+            <a:spAutoFit/>
+          </a:bodyPr>
+          <a:lstStyle/>
+          <a:p>
+            <a:pPr>
+              <a:defRPr sz="1400" b="1">
+                <a:solidFill>
+                  <a:srgbClr val="00468C"/>
+                </a:solidFill>
+              </a:defRPr>
+            </a:pPr>
+            <a:r>
+              <a:t>Discussion &amp; Implications</a:t>
+            </a:r>
+          </a:p>
+        </p:txBody>
+      </p:sp>
+      <p:sp>
+        <p:nvSpPr>
+          <p:cNvPr id="29" name="TextBox 28"/>
+          <p:cNvSpPr txBox="1"/>
+          <p:nvPr/>
+        </p:nvSpPr>
+        <p:spPr>
+          <a:xfrm>
+            <a:off x="4754880" y="4937760"/>
+            <a:ext cx="4114800" cy="411480"/>
+          </a:xfrm>
+          <a:prstGeom prst="rect">
+            <a:avLst/>
+          </a:prstGeom>
+          <a:noFill/>
+        </p:spPr>
+        <p:txBody>
+          <a:bodyPr wrap="none">
+            <a:spAutoFit/>
+          </a:bodyPr>
+          <a:lstStyle/>
+          <a:p>
+            <a:pPr>
+              <a:defRPr sz="1300">
+                <a:solidFill>
+                  <a:srgbClr val="323232"/>
+                </a:solidFill>
+              </a:defRPr>
+            </a:pPr>
+            <a:r>
+              <a:t>Key Findings</a:t>
+            </a:r>
+          </a:p>
+        </p:txBody>
+      </p:sp>
+      <p:sp>
+        <p:nvSpPr>
+          <p:cNvPr id="30" name="TextBox 29"/>
+          <p:cNvSpPr txBox="1"/>
+          <p:nvPr/>
+        </p:nvSpPr>
+        <p:spPr>
+          <a:xfrm>
+            <a:off x="457200" y="5394960"/>
+            <a:ext cx="457200" cy="411480"/>
+          </a:xfrm>
+          <a:prstGeom prst="rect">
+            <a:avLst/>
+          </a:prstGeom>
+          <a:noFill/>
+        </p:spPr>
+        <p:txBody>
+          <a:bodyPr wrap="none">
+            <a:spAutoFit/>
+          </a:bodyPr>
+          <a:lstStyle/>
+          <a:p>
+            <a:pPr>
+              <a:defRPr sz="1400" b="1">
+                <a:solidFill>
+                  <a:srgbClr val="002060"/>
+                </a:solidFill>
+              </a:defRPr>
+            </a:pPr>
+            <a:r>
+              <a:t>10.</a:t>
+            </a:r>
+          </a:p>
+        </p:txBody>
+      </p:sp>
+      <p:sp>
+        <p:nvSpPr>
+          <p:cNvPr id="31" name="TextBox 30"/>
+          <p:cNvSpPr txBox="1"/>
+          <p:nvPr/>
+        </p:nvSpPr>
+        <p:spPr>
+          <a:xfrm>
+            <a:off x="914400" y="5394960"/>
+            <a:ext cx="3657600" cy="411480"/>
+          </a:xfrm>
+          <a:prstGeom prst="rect">
+            <a:avLst/>
+          </a:prstGeom>
+          <a:noFill/>
+        </p:spPr>
+        <p:txBody>
+          <a:bodyPr wrap="none">
+            <a:spAutoFit/>
+          </a:bodyPr>
+          <a:lstStyle/>
+          <a:p>
+            <a:pPr>
+              <a:defRPr sz="1400" b="1">
+                <a:solidFill>
+                  <a:srgbClr val="00468C"/>
+                </a:solidFill>
+              </a:defRPr>
+            </a:pPr>
+            <a:r>
+              <a:t>Comments, Limitations &amp; Improvements</a:t>
+            </a:r>
+          </a:p>
+        </p:txBody>
+      </p:sp>
+      <p:sp>
+        <p:nvSpPr>
+          <p:cNvPr id="32" name="TextBox 31"/>
+          <p:cNvSpPr txBox="1"/>
+          <p:nvPr/>
+        </p:nvSpPr>
+        <p:spPr>
+          <a:xfrm>
+            <a:off x="4754880" y="5394960"/>
+            <a:ext cx="4114800" cy="411480"/>
+          </a:xfrm>
+          <a:prstGeom prst="rect">
+            <a:avLst/>
+          </a:prstGeom>
+          <a:noFill/>
+        </p:spPr>
+        <p:txBody>
+          <a:bodyPr wrap="none">
+            <a:spAutoFit/>
+          </a:bodyPr>
+          <a:lstStyle/>
+          <a:p>
+            <a:pPr>
+              <a:defRPr sz="1300">
+                <a:solidFill>
+                  <a:srgbClr val="323232"/>
+                </a:solidFill>
+              </a:defRPr>
+            </a:pPr>
+            <a:r>
+              <a:t>Critical Analysis</a:t>
+            </a:r>
+          </a:p>
+        </p:txBody>
+      </p:sp>
+      <p:sp>
+        <p:nvSpPr>
+          <p:cNvPr id="33" name="TextBox 32"/>
+          <p:cNvSpPr txBox="1"/>
+          <p:nvPr/>
+        </p:nvSpPr>
+        <p:spPr>
+          <a:xfrm>
+            <a:off x="457200" y="5852160"/>
+            <a:ext cx="457200" cy="411480"/>
+          </a:xfrm>
+          <a:prstGeom prst="rect">
+            <a:avLst/>
+          </a:prstGeom>
+          <a:noFill/>
+        </p:spPr>
+        <p:txBody>
+          <a:bodyPr wrap="none">
+            <a:spAutoFit/>
+          </a:bodyPr>
+          <a:lstStyle/>
+          <a:p>
+            <a:pPr>
+              <a:defRPr sz="1400" b="1">
+                <a:solidFill>
+                  <a:srgbClr val="002060"/>
+                </a:solidFill>
+              </a:defRPr>
+            </a:pPr>
+            <a:r>
+              <a:t>11.</a:t>
+            </a:r>
+          </a:p>
+        </p:txBody>
+      </p:sp>
+      <p:sp>
+        <p:nvSpPr>
+          <p:cNvPr id="34" name="TextBox 33"/>
+          <p:cNvSpPr txBox="1"/>
+          <p:nvPr/>
+        </p:nvSpPr>
+        <p:spPr>
+          <a:xfrm>
+            <a:off x="914400" y="5852160"/>
+            <a:ext cx="3657600" cy="411480"/>
+          </a:xfrm>
+          <a:prstGeom prst="rect">
+            <a:avLst/>
+          </a:prstGeom>
+          <a:noFill/>
+        </p:spPr>
+        <p:txBody>
+          <a:bodyPr wrap="none">
+            <a:spAutoFit/>
+          </a:bodyPr>
+          <a:lstStyle/>
+          <a:p>
+            <a:pPr>
+              <a:defRPr sz="1400" b="1">
+                <a:solidFill>
+                  <a:srgbClr val="00468C"/>
+                </a:solidFill>
+              </a:defRPr>
+            </a:pPr>
+            <a:r>
+              <a:t>Conclusion &amp; References</a:t>
+            </a:r>
+          </a:p>
+        </p:txBody>
+      </p:sp>
+      <p:sp>
+        <p:nvSpPr>
+          <p:cNvPr id="35" name="TextBox 34"/>
+          <p:cNvSpPr txBox="1"/>
+          <p:nvPr/>
+        </p:nvSpPr>
+        <p:spPr>
+          <a:xfrm>
+            <a:off x="4754880" y="5852160"/>
+            <a:ext cx="4114800" cy="411480"/>
+          </a:xfrm>
+          <a:prstGeom prst="rect">
+            <a:avLst/>
+          </a:prstGeom>
+          <a:noFill/>
+        </p:spPr>
+        <p:txBody>
+          <a:bodyPr wrap="none">
+            <a:spAutoFit/>
+          </a:bodyPr>
+          <a:lstStyle/>
+          <a:p>
+            <a:pPr>
+              <a:defRPr sz="1300">
+                <a:solidFill>
+                  <a:srgbClr val="323232"/>
+                </a:solidFill>
+              </a:defRPr>
+            </a:pPr>
+            <a:r>
+              <a:t>Summary</a:t>
             </a:r>
           </a:p>
         </p:txBody>
@@ -6067,7 +7717,7 @@
 </p:sld>
 </file>
 
-<file path=ppt/slides/slide18.xml><?xml version="1.0" encoding="utf-8"?>
+<file path=ppt/slides/slide20.xml><?xml version="1.0" encoding="utf-8"?>
 <p:sld xmlns:a="http://schemas.openxmlformats.org/drawingml/2006/main" xmlns:p="http://schemas.openxmlformats.org/presentationml/2006/main" xmlns:r="http://schemas.openxmlformats.org/officeDocument/2006/relationships">
   <p:cSld>
     <p:bg>
@@ -6132,7 +7782,7 @@
               </a:defRPr>
             </a:pPr>
             <a:r>
-              <a:t>Discussion &amp; Key Findings</a:t>
+              <a:t>Factor Interpretation &amp; Business Implications</a:t>
             </a:r>
           </a:p>
         </p:txBody>
@@ -6146,7 +7796,7 @@
         <p:spPr>
           <a:xfrm>
             <a:off x="274320" y="1280160"/>
-            <a:ext cx="8412480" cy="5303520"/>
+            <a:ext cx="4389120" cy="5029200"/>
           </a:xfrm>
           <a:prstGeom prst="rect">
             <a:avLst/>
@@ -6162,24 +7812,12 @@
             <a:pPr>
               <a:defRPr sz="1500" b="1">
                 <a:solidFill>
-                  <a:srgbClr val="006400"/>
-                </a:solidFill>
-              </a:defRPr>
-            </a:pPr>
-            <a:r>
-              <a:t>Finding 1: Job Satisfaction is Multidimensional</a:t>
-            </a:r>
-          </a:p>
-          <a:p>
-            <a:pPr>
-              <a:defRPr sz="1300">
-                <a:solidFill>
-                  <a:srgbClr val="323232"/>
-                </a:solidFill>
-              </a:defRPr>
-            </a:pPr>
-            <a:r>
-              <a:t>It is not just about money. Six distinct dimensions emerged from the analysis, showing that satisfaction comes from multiple sources: pay, management, supervision, communication, work itself, and coworkers</a:t>
+                  <a:srgbClr val="002060"/>
+                </a:solidFill>
+              </a:defRPr>
+            </a:pPr>
+            <a:r>
+              <a:t>What Each Factor Means for Organizations:</a:t>
             </a:r>
           </a:p>
           <a:p>
@@ -6189,26 +7827,50 @@
           </a:p>
           <a:p>
             <a:pPr>
-              <a:defRPr sz="1500" b="1">
+              <a:defRPr sz="1400" b="1">
                 <a:solidFill>
                   <a:srgbClr val="004080"/>
                 </a:solidFill>
               </a:defRPr>
             </a:pPr>
             <a:r>
-              <a:t>Finding 2: Benefits &amp; Salary is the Largest Factor</a:t>
-            </a:r>
-          </a:p>
-          <a:p>
-            <a:pPr>
-              <a:defRPr sz="1300">
-                <a:solidFill>
-                  <a:srgbClr val="323232"/>
-                </a:solidFill>
-              </a:defRPr>
-            </a:pPr>
-            <a:r>
-              <a:t>Compensation remains the biggest driver of satisfaction. Organizations that underpay will struggle to satisfy employees regardless of other factors</a:t>
+              <a:t>Factor 1: Benefits &amp; Salary</a:t>
+            </a:r>
+          </a:p>
+          <a:p>
+            <a:pPr>
+              <a:defRPr sz="1200">
+                <a:solidFill>
+                  <a:srgbClr val="323232"/>
+                </a:solidFill>
+              </a:defRPr>
+            </a:pPr>
+            <a:r>
+              <a:t>Largest factor - explains the most variance</a:t>
+            </a:r>
+          </a:p>
+          <a:p>
+            <a:pPr>
+              <a:defRPr sz="1200">
+                <a:solidFill>
+                  <a:srgbClr val="323232"/>
+                </a:solidFill>
+              </a:defRPr>
+            </a:pPr>
+            <a:r>
+              <a:t>Fair compensation is the foundation of satisfaction</a:t>
+            </a:r>
+          </a:p>
+          <a:p>
+            <a:pPr>
+              <a:defRPr sz="1200">
+                <a:solidFill>
+                  <a:srgbClr val="323232"/>
+                </a:solidFill>
+              </a:defRPr>
+            </a:pPr>
+            <a:r>
+              <a:t>Organizations must ensure competitive pay structures</a:t>
             </a:r>
           </a:p>
           <a:p>
@@ -6218,26 +7880,38 @@
           </a:p>
           <a:p>
             <a:pPr>
-              <a:defRPr sz="1500" b="1">
-                <a:solidFill>
-                  <a:srgbClr val="00468C"/>
-                </a:solidFill>
-              </a:defRPr>
-            </a:pPr>
-            <a:r>
-              <a:t>Finding 3: The JSS Framework is Robust</a:t>
-            </a:r>
-          </a:p>
-          <a:p>
-            <a:pPr>
-              <a:defRPr sz="1300">
-                <a:solidFill>
-                  <a:srgbClr val="323232"/>
-                </a:solidFill>
-              </a:defRPr>
-            </a:pPr>
-            <a:r>
-              <a:t>Spector's 36-item JSS instrument, originally with 9 dimensions, showed a stable 6-factor structure in the studied population, with good reliability (overall α = 0.81) and model fit (CFI = 0.906)</a:t>
+              <a:defRPr sz="1400" b="1">
+                <a:solidFill>
+                  <a:srgbClr val="004080"/>
+                </a:solidFill>
+              </a:defRPr>
+            </a:pPr>
+            <a:r>
+              <a:t>Factor 2: Management's Attitude</a:t>
+            </a:r>
+          </a:p>
+          <a:p>
+            <a:pPr>
+              <a:defRPr sz="1200">
+                <a:solidFill>
+                  <a:srgbClr val="323232"/>
+                </a:solidFill>
+              </a:defRPr>
+            </a:pPr>
+            <a:r>
+              <a:t>How leadership treats employees matters greatly</a:t>
+            </a:r>
+          </a:p>
+          <a:p>
+            <a:pPr>
+              <a:defRPr sz="1200">
+                <a:solidFill>
+                  <a:srgbClr val="323232"/>
+                </a:solidFill>
+              </a:defRPr>
+            </a:pPr>
+            <a:r>
+              <a:t>Respectful, supportive management boosts morale</a:t>
             </a:r>
           </a:p>
           <a:p>
@@ -6247,26 +7921,234 @@
           </a:p>
           <a:p>
             <a:pPr>
-              <a:defRPr sz="1500" b="1">
-                <a:solidFill>
-                  <a:srgbClr val="C86400"/>
-                </a:solidFill>
-              </a:defRPr>
-            </a:pPr>
-            <a:r>
-              <a:t>Finding 4: Satisfaction Directly Affects Performance</a:t>
-            </a:r>
-          </a:p>
-          <a:p>
-            <a:pPr>
-              <a:defRPr sz="1300">
-                <a:solidFill>
-                  <a:srgbClr val="323232"/>
-                </a:solidFill>
-              </a:defRPr>
-            </a:pPr>
-            <a:r>
-              <a:t>Dziuba et al. (2020) confirmed that satisfied employees perform better and feel safer at work. Salary satisfaction was the weakest area (4.7/10), suggesting room for improvement</a:t>
+              <a:defRPr sz="1400" b="1">
+                <a:solidFill>
+                  <a:srgbClr val="004080"/>
+                </a:solidFill>
+              </a:defRPr>
+            </a:pPr>
+            <a:r>
+              <a:t>Factor 3: Supervision</a:t>
+            </a:r>
+          </a:p>
+          <a:p>
+            <a:pPr>
+              <a:defRPr sz="1200">
+                <a:solidFill>
+                  <a:srgbClr val="323232"/>
+                </a:solidFill>
+              </a:defRPr>
+            </a:pPr>
+            <a:r>
+              <a:t>Quality of direct supervisors impacts daily work experience</a:t>
+            </a:r>
+          </a:p>
+          <a:p>
+            <a:pPr>
+              <a:defRPr sz="1200">
+                <a:solidFill>
+                  <a:srgbClr val="323232"/>
+                </a:solidFill>
+              </a:defRPr>
+            </a:pPr>
+            <a:r>
+              <a:t>Good supervisors provide guidance without micromanaging</a:t>
+            </a:r>
+          </a:p>
+        </p:txBody>
+      </p:sp>
+      <p:sp>
+        <p:nvSpPr>
+          <p:cNvPr id="4" name="TextBox 3"/>
+          <p:cNvSpPr txBox="1"/>
+          <p:nvPr/>
+        </p:nvSpPr>
+        <p:spPr>
+          <a:xfrm>
+            <a:off x="4846320" y="1280160"/>
+            <a:ext cx="4114800" cy="5029200"/>
+          </a:xfrm>
+          <a:prstGeom prst="rect">
+            <a:avLst/>
+          </a:prstGeom>
+          <a:noFill/>
+        </p:spPr>
+        <p:txBody>
+          <a:bodyPr wrap="square">
+            <a:spAutoFit/>
+          </a:bodyPr>
+          <a:lstStyle/>
+          <a:p>
+            <a:pPr>
+              <a:defRPr sz="600" b="0">
+                <a:solidFill>
+                  <a:srgbClr val="323232"/>
+                </a:solidFill>
+              </a:defRPr>
+            </a:pPr>
+          </a:p>
+          <a:p>
+            <a:pPr>
+              <a:defRPr sz="600"/>
+            </a:pPr>
+          </a:p>
+          <a:p>
+            <a:pPr>
+              <a:defRPr sz="1400" b="1">
+                <a:solidFill>
+                  <a:srgbClr val="004080"/>
+                </a:solidFill>
+              </a:defRPr>
+            </a:pPr>
+            <a:r>
+              <a:t>Factor 4: Communication</a:t>
+            </a:r>
+          </a:p>
+          <a:p>
+            <a:pPr>
+              <a:defRPr sz="1200">
+                <a:solidFill>
+                  <a:srgbClr val="323232"/>
+                </a:solidFill>
+              </a:defRPr>
+            </a:pPr>
+            <a:r>
+              <a:t>Clear information flow reduces confusion</a:t>
+            </a:r>
+          </a:p>
+          <a:p>
+            <a:pPr>
+              <a:defRPr sz="1200">
+                <a:solidFill>
+                  <a:srgbClr val="323232"/>
+                </a:solidFill>
+              </a:defRPr>
+            </a:pPr>
+            <a:r>
+              <a:t>Employees need to feel informed about decisions</a:t>
+            </a:r>
+          </a:p>
+          <a:p>
+            <a:pPr>
+              <a:defRPr sz="600"/>
+            </a:pPr>
+          </a:p>
+          <a:p>
+            <a:pPr>
+              <a:defRPr sz="1400" b="1">
+                <a:solidFill>
+                  <a:srgbClr val="004080"/>
+                </a:solidFill>
+              </a:defRPr>
+            </a:pPr>
+            <a:r>
+              <a:t>Factor 5: Nature of Work</a:t>
+            </a:r>
+          </a:p>
+          <a:p>
+            <a:pPr>
+              <a:defRPr sz="1200">
+                <a:solidFill>
+                  <a:srgbClr val="323232"/>
+                </a:solidFill>
+              </a:defRPr>
+            </a:pPr>
+            <a:r>
+              <a:t>Meaningful, interesting work increases engagement</a:t>
+            </a:r>
+          </a:p>
+          <a:p>
+            <a:pPr>
+              <a:defRPr sz="1200">
+                <a:solidFill>
+                  <a:srgbClr val="323232"/>
+                </a:solidFill>
+              </a:defRPr>
+            </a:pPr>
+            <a:r>
+              <a:t>Task variety and autonomy are important</a:t>
+            </a:r>
+          </a:p>
+          <a:p>
+            <a:pPr>
+              <a:defRPr sz="600"/>
+            </a:pPr>
+          </a:p>
+          <a:p>
+            <a:pPr>
+              <a:defRPr sz="1400" b="1">
+                <a:solidFill>
+                  <a:srgbClr val="004080"/>
+                </a:solidFill>
+              </a:defRPr>
+            </a:pPr>
+            <a:r>
+              <a:t>Factor 6: Colleagues' Support</a:t>
+            </a:r>
+          </a:p>
+          <a:p>
+            <a:pPr>
+              <a:defRPr sz="1200">
+                <a:solidFill>
+                  <a:srgbClr val="323232"/>
+                </a:solidFill>
+              </a:defRPr>
+            </a:pPr>
+            <a:r>
+              <a:t>Positive coworker relationships create a supportive environment</a:t>
+            </a:r>
+          </a:p>
+          <a:p>
+            <a:pPr>
+              <a:defRPr sz="1200">
+                <a:solidFill>
+                  <a:srgbClr val="323232"/>
+                </a:solidFill>
+              </a:defRPr>
+            </a:pPr>
+            <a:r>
+              <a:t>Teamwork and collaboration drive satisfaction</a:t>
+            </a:r>
+          </a:p>
+          <a:p>
+            <a:pPr>
+              <a:defRPr sz="600"/>
+            </a:pPr>
+          </a:p>
+          <a:p>
+            <a:pPr>
+              <a:defRPr sz="1400" b="1">
+                <a:solidFill>
+                  <a:srgbClr val="008000"/>
+                </a:solidFill>
+              </a:defRPr>
+            </a:pPr>
+            <a:r>
+              <a:t>Actionable Insight:</a:t>
+            </a:r>
+          </a:p>
+          <a:p>
+            <a:pPr>
+              <a:defRPr sz="1200">
+                <a:solidFill>
+                  <a:srgbClr val="323232"/>
+                </a:solidFill>
+              </a:defRPr>
+            </a:pPr>
+            <a:r>
+              <a:t>Organizations should invest in all 6 areas,</a:t>
+            </a:r>
+          </a:p>
+          <a:p>
+            <a:pPr>
+              <a:defRPr sz="1200">
+                <a:solidFill>
+                  <a:srgbClr val="323232"/>
+                </a:solidFill>
+              </a:defRPr>
+            </a:pPr>
+            <a:r>
+              <a:t>but prioritize pay fairness and management quality</a:t>
             </a:r>
           </a:p>
         </p:txBody>
@@ -6279,7 +8161,7 @@
 </p:sld>
 </file>
 
-<file path=ppt/slides/slide19.xml><?xml version="1.0" encoding="utf-8"?>
+<file path=ppt/slides/slide21.xml><?xml version="1.0" encoding="utf-8"?>
 <p:sld xmlns:a="http://schemas.openxmlformats.org/drawingml/2006/main" xmlns:p="http://schemas.openxmlformats.org/presentationml/2006/main" xmlns:r="http://schemas.openxmlformats.org/officeDocument/2006/relationships">
   <p:cSld>
     <p:bg>
@@ -6344,7 +8226,7 @@
               </a:defRPr>
             </a:pPr>
             <a:r>
-              <a:t>Comments</a:t>
+              <a:t>Discussion &amp; Key Findings</a:t>
             </a:r>
           </a:p>
         </p:txBody>
@@ -6372,14 +8254,26 @@
           <a:lstStyle/>
           <a:p>
             <a:pPr>
-              <a:defRPr sz="1600" b="1">
-                <a:solidFill>
-                  <a:srgbClr val="002060"/>
-                </a:solidFill>
-              </a:defRPr>
-            </a:pPr>
-            <a:r>
-              <a:t>Strengths of This Analysis:</a:t>
+              <a:defRPr sz="1500" b="1">
+                <a:solidFill>
+                  <a:srgbClr val="006400"/>
+                </a:solidFill>
+              </a:defRPr>
+            </a:pPr>
+            <a:r>
+              <a:t>Finding 1: Job Satisfaction is Multidimensional</a:t>
+            </a:r>
+          </a:p>
+          <a:p>
+            <a:pPr>
+              <a:defRPr sz="1300">
+                <a:solidFill>
+                  <a:srgbClr val="323232"/>
+                </a:solidFill>
+              </a:defRPr>
+            </a:pPr>
+            <a:r>
+              <a:t>It is not just about money. Six distinct dimensions emerged from the analysis, showing that satisfaction comes from multiple sources: pay, management, supervision, communication, work itself, and coworkers</a:t>
             </a:r>
           </a:p>
           <a:p>
@@ -6389,6 +8283,18 @@
           </a:p>
           <a:p>
             <a:pPr>
+              <a:defRPr sz="1500" b="1">
+                <a:solidFill>
+                  <a:srgbClr val="004080"/>
+                </a:solidFill>
+              </a:defRPr>
+            </a:pPr>
+            <a:r>
+              <a:t>Finding 2: Benefits &amp; Salary is the Largest Factor</a:t>
+            </a:r>
+          </a:p>
+          <a:p>
+            <a:pPr>
               <a:defRPr sz="1300">
                 <a:solidFill>
                   <a:srgbClr val="323232"/>
@@ -6396,7 +8302,7 @@
               </a:defRPr>
             </a:pPr>
             <a:r>
-              <a:t>Both EFA and CFA were used, providing a thorough validation of the factor structure</a:t>
+              <a:t>Compensation remains the biggest driver of satisfaction. Organizations that underpay will struggle to satisfy employees regardless of other factors</a:t>
             </a:r>
           </a:p>
           <a:p>
@@ -6406,6 +8312,18 @@
           </a:p>
           <a:p>
             <a:pPr>
+              <a:defRPr sz="1500" b="1">
+                <a:solidFill>
+                  <a:srgbClr val="00468C"/>
+                </a:solidFill>
+              </a:defRPr>
+            </a:pPr>
+            <a:r>
+              <a:t>Finding 3: The JSS Framework is Robust</a:t>
+            </a:r>
+          </a:p>
+          <a:p>
+            <a:pPr>
               <a:defRPr sz="1300">
                 <a:solidFill>
                   <a:srgbClr val="323232"/>
@@ -6413,7 +8331,7 @@
               </a:defRPr>
             </a:pPr>
             <a:r>
-              <a:t>Large sample size (n = 590) ensures statistical power and reliable factor estimates</a:t>
+              <a:t>Spector's 36-item JSS instrument, originally with 9 dimensions, showed a stable 6-factor structure in the studied population, with good reliability (overall α = 0.81) and model fit (CFI = 0.906)</a:t>
             </a:r>
           </a:p>
           <a:p>
@@ -6423,6 +8341,18 @@
           </a:p>
           <a:p>
             <a:pPr>
+              <a:defRPr sz="1500" b="1">
+                <a:solidFill>
+                  <a:srgbClr val="C86400"/>
+                </a:solidFill>
+              </a:defRPr>
+            </a:pPr>
+            <a:r>
+              <a:t>Finding 4: Satisfaction Directly Affects Performance</a:t>
+            </a:r>
+          </a:p>
+          <a:p>
+            <a:pPr>
               <a:defRPr sz="1300">
                 <a:solidFill>
                   <a:srgbClr val="323232"/>
@@ -6430,92 +8360,7 @@
               </a:defRPr>
             </a:pPr>
             <a:r>
-              <a:t>The KMO value of 0.912 is superb, indicating excellent suitability for factor analysis</a:t>
-            </a:r>
-          </a:p>
-          <a:p>
-            <a:pPr>
-              <a:defRPr sz="600"/>
-            </a:pPr>
-          </a:p>
-          <a:p>
-            <a:pPr>
-              <a:defRPr sz="1300">
-                <a:solidFill>
-                  <a:srgbClr val="323232"/>
-                </a:solidFill>
-              </a:defRPr>
-            </a:pPr>
-            <a:r>
-              <a:t>The JSS is a well-established, free instrument validated across 30+ countries</a:t>
-            </a:r>
-          </a:p>
-          <a:p>
-            <a:pPr>
-              <a:defRPr sz="600"/>
-            </a:pPr>
-          </a:p>
-          <a:p>
-            <a:pPr>
-              <a:defRPr sz="1600" b="1">
-                <a:solidFill>
-                  <a:srgbClr val="00468C"/>
-                </a:solidFill>
-              </a:defRPr>
-            </a:pPr>
-            <a:r>
-              <a:t>Observations:</a:t>
-            </a:r>
-          </a:p>
-          <a:p>
-            <a:pPr>
-              <a:defRPr sz="600"/>
-            </a:pPr>
-          </a:p>
-          <a:p>
-            <a:pPr>
-              <a:defRPr sz="1300">
-                <a:solidFill>
-                  <a:srgbClr val="323232"/>
-                </a:solidFill>
-              </a:defRPr>
-            </a:pPr>
-            <a:r>
-              <a:t>The original 9-factor JSS consolidated into 6 factors, suggesting some dimensions overlap in this context</a:t>
-            </a:r>
-          </a:p>
-          <a:p>
-            <a:pPr>
-              <a:defRPr sz="600"/>
-            </a:pPr>
-          </a:p>
-          <a:p>
-            <a:pPr>
-              <a:defRPr sz="1300">
-                <a:solidFill>
-                  <a:srgbClr val="323232"/>
-                </a:solidFill>
-              </a:defRPr>
-            </a:pPr>
-            <a:r>
-              <a:t>Two dimensions (Nature of Work and Communication) showed lower reliability, which could be improved with revised items</a:t>
-            </a:r>
-          </a:p>
-          <a:p>
-            <a:pPr>
-              <a:defRPr sz="600"/>
-            </a:pPr>
-          </a:p>
-          <a:p>
-            <a:pPr>
-              <a:defRPr sz="1300">
-                <a:solidFill>
-                  <a:srgbClr val="323232"/>
-                </a:solidFill>
-              </a:defRPr>
-            </a:pPr>
-            <a:r>
-              <a:t>The Dziuba et al. (2020) study reinforces the practical importance of satisfaction research by linking it directly to employee performance and safety</a:t>
+              <a:t>Dziuba et al. (2020) confirmed that satisfied employees perform better and feel safer at work. Salary satisfaction was the weakest area (4.7/10), suggesting room for improvement</a:t>
             </a:r>
           </a:p>
         </p:txBody>
@@ -6528,7 +8373,7 @@
 </p:sld>
 </file>
 
-<file path=ppt/slides/slide2.xml><?xml version="1.0" encoding="utf-8"?>
+<file path=ppt/slides/slide22.xml><?xml version="1.0" encoding="utf-8"?>
 <p:sld xmlns:a="http://schemas.openxmlformats.org/drawingml/2006/main" xmlns:p="http://schemas.openxmlformats.org/presentationml/2006/main" xmlns:r="http://schemas.openxmlformats.org/officeDocument/2006/relationships">
   <p:cSld>
     <p:bg>
@@ -6593,7 +8438,7 @@
               </a:defRPr>
             </a:pPr>
             <a:r>
-              <a:t>Agenda</a:t>
+              <a:t>Comments</a:t>
             </a:r>
           </a:p>
         </p:txBody>
@@ -6606,8 +8451,8 @@
         </p:nvSpPr>
         <p:spPr>
           <a:xfrm>
-            <a:off x="457200" y="1280160"/>
-            <a:ext cx="457200" cy="411480"/>
+            <a:off x="274320" y="1280160"/>
+            <a:ext cx="8412480" cy="5303520"/>
           </a:xfrm>
           <a:prstGeom prst="rect">
             <a:avLst/>
@@ -6615,80 +8460,112 @@
           <a:noFill/>
         </p:spPr>
         <p:txBody>
-          <a:bodyPr wrap="none">
+          <a:bodyPr wrap="square">
             <a:spAutoFit/>
           </a:bodyPr>
           <a:lstStyle/>
           <a:p>
             <a:pPr>
-              <a:defRPr sz="1400" b="1">
+              <a:defRPr sz="1600" b="1">
                 <a:solidFill>
                   <a:srgbClr val="002060"/>
                 </a:solidFill>
               </a:defRPr>
             </a:pPr>
             <a:r>
-              <a:t>1.</a:t>
-            </a:r>
-          </a:p>
-        </p:txBody>
-      </p:sp>
-      <p:sp>
-        <p:nvSpPr>
-          <p:cNvPr id="4" name="TextBox 3"/>
-          <p:cNvSpPr txBox="1"/>
-          <p:nvPr/>
-        </p:nvSpPr>
-        <p:spPr>
-          <a:xfrm>
-            <a:off x="914400" y="1280160"/>
-            <a:ext cx="3657600" cy="411480"/>
-          </a:xfrm>
-          <a:prstGeom prst="rect">
-            <a:avLst/>
-          </a:prstGeom>
-          <a:noFill/>
-        </p:spPr>
-        <p:txBody>
-          <a:bodyPr wrap="none">
-            <a:spAutoFit/>
-          </a:bodyPr>
-          <a:lstStyle/>
-          <a:p>
-            <a:pPr>
-              <a:defRPr sz="1400" b="1">
+              <a:t>Strengths of This Analysis:</a:t>
+            </a:r>
+          </a:p>
+          <a:p>
+            <a:pPr>
+              <a:defRPr sz="600"/>
+            </a:pPr>
+          </a:p>
+          <a:p>
+            <a:pPr>
+              <a:defRPr sz="1300">
+                <a:solidFill>
+                  <a:srgbClr val="323232"/>
+                </a:solidFill>
+              </a:defRPr>
+            </a:pPr>
+            <a:r>
+              <a:t>Both EFA and CFA were used, providing a thorough validation of the factor structure</a:t>
+            </a:r>
+          </a:p>
+          <a:p>
+            <a:pPr>
+              <a:defRPr sz="600"/>
+            </a:pPr>
+          </a:p>
+          <a:p>
+            <a:pPr>
+              <a:defRPr sz="1300">
+                <a:solidFill>
+                  <a:srgbClr val="323232"/>
+                </a:solidFill>
+              </a:defRPr>
+            </a:pPr>
+            <a:r>
+              <a:t>Large sample size (n = 590) ensures statistical power and reliable factor estimates</a:t>
+            </a:r>
+          </a:p>
+          <a:p>
+            <a:pPr>
+              <a:defRPr sz="600"/>
+            </a:pPr>
+          </a:p>
+          <a:p>
+            <a:pPr>
+              <a:defRPr sz="1300">
+                <a:solidFill>
+                  <a:srgbClr val="323232"/>
+                </a:solidFill>
+              </a:defRPr>
+            </a:pPr>
+            <a:r>
+              <a:t>The KMO value of 0.912 is superb, indicating excellent suitability for factor analysis</a:t>
+            </a:r>
+          </a:p>
+          <a:p>
+            <a:pPr>
+              <a:defRPr sz="600"/>
+            </a:pPr>
+          </a:p>
+          <a:p>
+            <a:pPr>
+              <a:defRPr sz="1300">
+                <a:solidFill>
+                  <a:srgbClr val="323232"/>
+                </a:solidFill>
+              </a:defRPr>
+            </a:pPr>
+            <a:r>
+              <a:t>The JSS is a well-established, free instrument validated across 30+ countries</a:t>
+            </a:r>
+          </a:p>
+          <a:p>
+            <a:pPr>
+              <a:defRPr sz="600"/>
+            </a:pPr>
+          </a:p>
+          <a:p>
+            <a:pPr>
+              <a:defRPr sz="1600" b="1">
                 <a:solidFill>
                   <a:srgbClr val="00468C"/>
                 </a:solidFill>
               </a:defRPr>
             </a:pPr>
             <a:r>
-              <a:t>Problem Statement</a:t>
-            </a:r>
-          </a:p>
-        </p:txBody>
-      </p:sp>
-      <p:sp>
-        <p:nvSpPr>
-          <p:cNvPr id="5" name="TextBox 4"/>
-          <p:cNvSpPr txBox="1"/>
-          <p:nvPr/>
-        </p:nvSpPr>
-        <p:spPr>
-          <a:xfrm>
-            <a:off x="4754880" y="1280160"/>
-            <a:ext cx="4114800" cy="411480"/>
-          </a:xfrm>
-          <a:prstGeom prst="rect">
-            <a:avLst/>
-          </a:prstGeom>
-          <a:noFill/>
-        </p:spPr>
-        <p:txBody>
-          <a:bodyPr wrap="none">
-            <a:spAutoFit/>
-          </a:bodyPr>
-          <a:lstStyle/>
+              <a:t>Observations:</a:t>
+            </a:r>
+          </a:p>
+          <a:p>
+            <a:pPr>
+              <a:defRPr sz="600"/>
+            </a:pPr>
+          </a:p>
           <a:p>
             <a:pPr>
               <a:defRPr sz="1300">
@@ -6698,102 +8575,14 @@
               </a:defRPr>
             </a:pPr>
             <a:r>
-              <a:t>Why Study Job Satisfaction?</a:t>
-            </a:r>
-          </a:p>
-        </p:txBody>
-      </p:sp>
-      <p:sp>
-        <p:nvSpPr>
-          <p:cNvPr id="6" name="TextBox 5"/>
-          <p:cNvSpPr txBox="1"/>
-          <p:nvPr/>
-        </p:nvSpPr>
-        <p:spPr>
-          <a:xfrm>
-            <a:off x="457200" y="1737360"/>
-            <a:ext cx="457200" cy="411480"/>
-          </a:xfrm>
-          <a:prstGeom prst="rect">
-            <a:avLst/>
-          </a:prstGeom>
-          <a:noFill/>
-        </p:spPr>
-        <p:txBody>
-          <a:bodyPr wrap="none">
-            <a:spAutoFit/>
-          </a:bodyPr>
-          <a:lstStyle/>
-          <a:p>
-            <a:pPr>
-              <a:defRPr sz="1400" b="1">
-                <a:solidFill>
-                  <a:srgbClr val="002060"/>
-                </a:solidFill>
-              </a:defRPr>
-            </a:pPr>
-            <a:r>
-              <a:t>2.</a:t>
-            </a:r>
-          </a:p>
-        </p:txBody>
-      </p:sp>
-      <p:sp>
-        <p:nvSpPr>
-          <p:cNvPr id="7" name="TextBox 6"/>
-          <p:cNvSpPr txBox="1"/>
-          <p:nvPr/>
-        </p:nvSpPr>
-        <p:spPr>
-          <a:xfrm>
-            <a:off x="914400" y="1737360"/>
-            <a:ext cx="3657600" cy="411480"/>
-          </a:xfrm>
-          <a:prstGeom prst="rect">
-            <a:avLst/>
-          </a:prstGeom>
-          <a:noFill/>
-        </p:spPr>
-        <p:txBody>
-          <a:bodyPr wrap="none">
-            <a:spAutoFit/>
-          </a:bodyPr>
-          <a:lstStyle/>
-          <a:p>
-            <a:pPr>
-              <a:defRPr sz="1400" b="1">
-                <a:solidFill>
-                  <a:srgbClr val="00468C"/>
-                </a:solidFill>
-              </a:defRPr>
-            </a:pPr>
-            <a:r>
-              <a:t>Article Information</a:t>
-            </a:r>
-          </a:p>
-        </p:txBody>
-      </p:sp>
-      <p:sp>
-        <p:nvSpPr>
-          <p:cNvPr id="8" name="TextBox 7"/>
-          <p:cNvSpPr txBox="1"/>
-          <p:nvPr/>
-        </p:nvSpPr>
-        <p:spPr>
-          <a:xfrm>
-            <a:off x="4754880" y="1737360"/>
-            <a:ext cx="4114800" cy="411480"/>
-          </a:xfrm>
-          <a:prstGeom prst="rect">
-            <a:avLst/>
-          </a:prstGeom>
-          <a:noFill/>
-        </p:spPr>
-        <p:txBody>
-          <a:bodyPr wrap="none">
-            <a:spAutoFit/>
-          </a:bodyPr>
-          <a:lstStyle/>
+              <a:t>The original 9-factor JSS consolidated into 6 factors, suggesting some dimensions overlap in this context</a:t>
+            </a:r>
+          </a:p>
+          <a:p>
+            <a:pPr>
+              <a:defRPr sz="600"/>
+            </a:pPr>
+          </a:p>
           <a:p>
             <a:pPr>
               <a:defRPr sz="1300">
@@ -6803,102 +8592,14 @@
               </a:defRPr>
             </a:pPr>
             <a:r>
-              <a:t>Key Research Papers</a:t>
-            </a:r>
-          </a:p>
-        </p:txBody>
-      </p:sp>
-      <p:sp>
-        <p:nvSpPr>
-          <p:cNvPr id="9" name="TextBox 8"/>
-          <p:cNvSpPr txBox="1"/>
-          <p:nvPr/>
-        </p:nvSpPr>
-        <p:spPr>
-          <a:xfrm>
-            <a:off x="457200" y="2194560"/>
-            <a:ext cx="457200" cy="411480"/>
-          </a:xfrm>
-          <a:prstGeom prst="rect">
-            <a:avLst/>
-          </a:prstGeom>
-          <a:noFill/>
-        </p:spPr>
-        <p:txBody>
-          <a:bodyPr wrap="none">
-            <a:spAutoFit/>
-          </a:bodyPr>
-          <a:lstStyle/>
-          <a:p>
-            <a:pPr>
-              <a:defRPr sz="1400" b="1">
-                <a:solidFill>
-                  <a:srgbClr val="002060"/>
-                </a:solidFill>
-              </a:defRPr>
-            </a:pPr>
-            <a:r>
-              <a:t>3.</a:t>
-            </a:r>
-          </a:p>
-        </p:txBody>
-      </p:sp>
-      <p:sp>
-        <p:nvSpPr>
-          <p:cNvPr id="10" name="TextBox 9"/>
-          <p:cNvSpPr txBox="1"/>
-          <p:nvPr/>
-        </p:nvSpPr>
-        <p:spPr>
-          <a:xfrm>
-            <a:off x="914400" y="2194560"/>
-            <a:ext cx="3657600" cy="411480"/>
-          </a:xfrm>
-          <a:prstGeom prst="rect">
-            <a:avLst/>
-          </a:prstGeom>
-          <a:noFill/>
-        </p:spPr>
-        <p:txBody>
-          <a:bodyPr wrap="none">
-            <a:spAutoFit/>
-          </a:bodyPr>
-          <a:lstStyle/>
-          <a:p>
-            <a:pPr>
-              <a:defRPr sz="1400" b="1">
-                <a:solidFill>
-                  <a:srgbClr val="00468C"/>
-                </a:solidFill>
-              </a:defRPr>
-            </a:pPr>
-            <a:r>
-              <a:t>Factor Analysis Overview</a:t>
-            </a:r>
-          </a:p>
-        </p:txBody>
-      </p:sp>
-      <p:sp>
-        <p:nvSpPr>
-          <p:cNvPr id="11" name="TextBox 10"/>
-          <p:cNvSpPr txBox="1"/>
-          <p:nvPr/>
-        </p:nvSpPr>
-        <p:spPr>
-          <a:xfrm>
-            <a:off x="4754880" y="2194560"/>
-            <a:ext cx="4114800" cy="411480"/>
-          </a:xfrm>
-          <a:prstGeom prst="rect">
-            <a:avLst/>
-          </a:prstGeom>
-          <a:noFill/>
-        </p:spPr>
-        <p:txBody>
-          <a:bodyPr wrap="none">
-            <a:spAutoFit/>
-          </a:bodyPr>
-          <a:lstStyle/>
+              <a:t>Two dimensions (Nature of Work and Communication) showed lower reliability, which could be improved with revised items</a:t>
+            </a:r>
+          </a:p>
+          <a:p>
+            <a:pPr>
+              <a:defRPr sz="600"/>
+            </a:pPr>
+          </a:p>
           <a:p>
             <a:pPr>
               <a:defRPr sz="1300">
@@ -6908,847 +8609,7 @@
               </a:defRPr>
             </a:pPr>
             <a:r>
-              <a:t>What is Factor Analysis?</a:t>
-            </a:r>
-          </a:p>
-        </p:txBody>
-      </p:sp>
-      <p:sp>
-        <p:nvSpPr>
-          <p:cNvPr id="12" name="TextBox 11"/>
-          <p:cNvSpPr txBox="1"/>
-          <p:nvPr/>
-        </p:nvSpPr>
-        <p:spPr>
-          <a:xfrm>
-            <a:off x="457200" y="2651760"/>
-            <a:ext cx="457200" cy="411480"/>
-          </a:xfrm>
-          <a:prstGeom prst="rect">
-            <a:avLst/>
-          </a:prstGeom>
-          <a:noFill/>
-        </p:spPr>
-        <p:txBody>
-          <a:bodyPr wrap="none">
-            <a:spAutoFit/>
-          </a:bodyPr>
-          <a:lstStyle/>
-          <a:p>
-            <a:pPr>
-              <a:defRPr sz="1400" b="1">
-                <a:solidFill>
-                  <a:srgbClr val="002060"/>
-                </a:solidFill>
-              </a:defRPr>
-            </a:pPr>
-            <a:r>
-              <a:t>4.</a:t>
-            </a:r>
-          </a:p>
-        </p:txBody>
-      </p:sp>
-      <p:sp>
-        <p:nvSpPr>
-          <p:cNvPr id="13" name="TextBox 12"/>
-          <p:cNvSpPr txBox="1"/>
-          <p:nvPr/>
-        </p:nvSpPr>
-        <p:spPr>
-          <a:xfrm>
-            <a:off x="914400" y="2651760"/>
-            <a:ext cx="3657600" cy="411480"/>
-          </a:xfrm>
-          <a:prstGeom prst="rect">
-            <a:avLst/>
-          </a:prstGeom>
-          <a:noFill/>
-        </p:spPr>
-        <p:txBody>
-          <a:bodyPr wrap="none">
-            <a:spAutoFit/>
-          </a:bodyPr>
-          <a:lstStyle/>
-          <a:p>
-            <a:pPr>
-              <a:defRPr sz="1400" b="1">
-                <a:solidFill>
-                  <a:srgbClr val="00468C"/>
-                </a:solidFill>
-              </a:defRPr>
-            </a:pPr>
-            <a:r>
-              <a:t>FA Procedure</a:t>
-            </a:r>
-          </a:p>
-        </p:txBody>
-      </p:sp>
-      <p:sp>
-        <p:nvSpPr>
-          <p:cNvPr id="14" name="TextBox 13"/>
-          <p:cNvSpPr txBox="1"/>
-          <p:nvPr/>
-        </p:nvSpPr>
-        <p:spPr>
-          <a:xfrm>
-            <a:off x="4754880" y="2651760"/>
-            <a:ext cx="4114800" cy="411480"/>
-          </a:xfrm>
-          <a:prstGeom prst="rect">
-            <a:avLst/>
-          </a:prstGeom>
-          <a:noFill/>
-        </p:spPr>
-        <p:txBody>
-          <a:bodyPr wrap="none">
-            <a:spAutoFit/>
-          </a:bodyPr>
-          <a:lstStyle/>
-          <a:p>
-            <a:pPr>
-              <a:defRPr sz="1300">
-                <a:solidFill>
-                  <a:srgbClr val="323232"/>
-                </a:solidFill>
-              </a:defRPr>
-            </a:pPr>
-            <a:r>
-              <a:t>Step-by-Step Methodology</a:t>
-            </a:r>
-          </a:p>
-        </p:txBody>
-      </p:sp>
-      <p:sp>
-        <p:nvSpPr>
-          <p:cNvPr id="15" name="TextBox 14"/>
-          <p:cNvSpPr txBox="1"/>
-          <p:nvPr/>
-        </p:nvSpPr>
-        <p:spPr>
-          <a:xfrm>
-            <a:off x="457200" y="3108960"/>
-            <a:ext cx="457200" cy="411480"/>
-          </a:xfrm>
-          <a:prstGeom prst="rect">
-            <a:avLst/>
-          </a:prstGeom>
-          <a:noFill/>
-        </p:spPr>
-        <p:txBody>
-          <a:bodyPr wrap="none">
-            <a:spAutoFit/>
-          </a:bodyPr>
-          <a:lstStyle/>
-          <a:p>
-            <a:pPr>
-              <a:defRPr sz="1400" b="1">
-                <a:solidFill>
-                  <a:srgbClr val="002060"/>
-                </a:solidFill>
-              </a:defRPr>
-            </a:pPr>
-            <a:r>
-              <a:t>5.</a:t>
-            </a:r>
-          </a:p>
-        </p:txBody>
-      </p:sp>
-      <p:sp>
-        <p:nvSpPr>
-          <p:cNvPr id="16" name="TextBox 15"/>
-          <p:cNvSpPr txBox="1"/>
-          <p:nvPr/>
-        </p:nvSpPr>
-        <p:spPr>
-          <a:xfrm>
-            <a:off x="914400" y="3108960"/>
-            <a:ext cx="3657600" cy="411480"/>
-          </a:xfrm>
-          <a:prstGeom prst="rect">
-            <a:avLst/>
-          </a:prstGeom>
-          <a:noFill/>
-        </p:spPr>
-        <p:txBody>
-          <a:bodyPr wrap="none">
-            <a:spAutoFit/>
-          </a:bodyPr>
-          <a:lstStyle/>
-          <a:p>
-            <a:pPr>
-              <a:defRPr sz="1400" b="1">
-                <a:solidFill>
-                  <a:srgbClr val="00468C"/>
-                </a:solidFill>
-              </a:defRPr>
-            </a:pPr>
-            <a:r>
-              <a:t>Case Study</a:t>
-            </a:r>
-          </a:p>
-        </p:txBody>
-      </p:sp>
-      <p:sp>
-        <p:nvSpPr>
-          <p:cNvPr id="17" name="TextBox 16"/>
-          <p:cNvSpPr txBox="1"/>
-          <p:nvPr/>
-        </p:nvSpPr>
-        <p:spPr>
-          <a:xfrm>
-            <a:off x="4754880" y="3108960"/>
-            <a:ext cx="4114800" cy="411480"/>
-          </a:xfrm>
-          <a:prstGeom prst="rect">
-            <a:avLst/>
-          </a:prstGeom>
-          <a:noFill/>
-        </p:spPr>
-        <p:txBody>
-          <a:bodyPr wrap="none">
-            <a:spAutoFit/>
-          </a:bodyPr>
-          <a:lstStyle/>
-          <a:p>
-            <a:pPr>
-              <a:defRPr sz="1300">
-                <a:solidFill>
-                  <a:srgbClr val="323232"/>
-                </a:solidFill>
-              </a:defRPr>
-            </a:pPr>
-            <a:r>
-              <a:t>Job Satisfaction in Healthcare</a:t>
-            </a:r>
-          </a:p>
-        </p:txBody>
-      </p:sp>
-      <p:sp>
-        <p:nvSpPr>
-          <p:cNvPr id="18" name="TextBox 17"/>
-          <p:cNvSpPr txBox="1"/>
-          <p:nvPr/>
-        </p:nvSpPr>
-        <p:spPr>
-          <a:xfrm>
-            <a:off x="457200" y="3566160"/>
-            <a:ext cx="457200" cy="411480"/>
-          </a:xfrm>
-          <a:prstGeom prst="rect">
-            <a:avLst/>
-          </a:prstGeom>
-          <a:noFill/>
-        </p:spPr>
-        <p:txBody>
-          <a:bodyPr wrap="none">
-            <a:spAutoFit/>
-          </a:bodyPr>
-          <a:lstStyle/>
-          <a:p>
-            <a:pPr>
-              <a:defRPr sz="1400" b="1">
-                <a:solidFill>
-                  <a:srgbClr val="002060"/>
-                </a:solidFill>
-              </a:defRPr>
-            </a:pPr>
-            <a:r>
-              <a:t>6.</a:t>
-            </a:r>
-          </a:p>
-        </p:txBody>
-      </p:sp>
-      <p:sp>
-        <p:nvSpPr>
-          <p:cNvPr id="19" name="TextBox 18"/>
-          <p:cNvSpPr txBox="1"/>
-          <p:nvPr/>
-        </p:nvSpPr>
-        <p:spPr>
-          <a:xfrm>
-            <a:off x="914400" y="3566160"/>
-            <a:ext cx="3657600" cy="411480"/>
-          </a:xfrm>
-          <a:prstGeom prst="rect">
-            <a:avLst/>
-          </a:prstGeom>
-          <a:noFill/>
-        </p:spPr>
-        <p:txBody>
-          <a:bodyPr wrap="none">
-            <a:spAutoFit/>
-          </a:bodyPr>
-          <a:lstStyle/>
-          <a:p>
-            <a:pPr>
-              <a:defRPr sz="1400" b="1">
-                <a:solidFill>
-                  <a:srgbClr val="00468C"/>
-                </a:solidFill>
-              </a:defRPr>
-            </a:pPr>
-            <a:r>
-              <a:t>Spector's JSS Framework</a:t>
-            </a:r>
-          </a:p>
-        </p:txBody>
-      </p:sp>
-      <p:sp>
-        <p:nvSpPr>
-          <p:cNvPr id="20" name="TextBox 19"/>
-          <p:cNvSpPr txBox="1"/>
-          <p:nvPr/>
-        </p:nvSpPr>
-        <p:spPr>
-          <a:xfrm>
-            <a:off x="4754880" y="3566160"/>
-            <a:ext cx="4114800" cy="411480"/>
-          </a:xfrm>
-          <a:prstGeom prst="rect">
-            <a:avLst/>
-          </a:prstGeom>
-          <a:noFill/>
-        </p:spPr>
-        <p:txBody>
-          <a:bodyPr wrap="none">
-            <a:spAutoFit/>
-          </a:bodyPr>
-          <a:lstStyle/>
-          <a:p>
-            <a:pPr>
-              <a:defRPr sz="1300">
-                <a:solidFill>
-                  <a:srgbClr val="323232"/>
-                </a:solidFill>
-              </a:defRPr>
-            </a:pPr>
-            <a:r>
-              <a:t>9 Dimensions of Satisfaction</a:t>
-            </a:r>
-          </a:p>
-        </p:txBody>
-      </p:sp>
-      <p:sp>
-        <p:nvSpPr>
-          <p:cNvPr id="21" name="TextBox 20"/>
-          <p:cNvSpPr txBox="1"/>
-          <p:nvPr/>
-        </p:nvSpPr>
-        <p:spPr>
-          <a:xfrm>
-            <a:off x="457200" y="4023360"/>
-            <a:ext cx="457200" cy="411480"/>
-          </a:xfrm>
-          <a:prstGeom prst="rect">
-            <a:avLst/>
-          </a:prstGeom>
-          <a:noFill/>
-        </p:spPr>
-        <p:txBody>
-          <a:bodyPr wrap="none">
-            <a:spAutoFit/>
-          </a:bodyPr>
-          <a:lstStyle/>
-          <a:p>
-            <a:pPr>
-              <a:defRPr sz="1400" b="1">
-                <a:solidFill>
-                  <a:srgbClr val="002060"/>
-                </a:solidFill>
-              </a:defRPr>
-            </a:pPr>
-            <a:r>
-              <a:t>7.</a:t>
-            </a:r>
-          </a:p>
-        </p:txBody>
-      </p:sp>
-      <p:sp>
-        <p:nvSpPr>
-          <p:cNvPr id="22" name="TextBox 21"/>
-          <p:cNvSpPr txBox="1"/>
-          <p:nvPr/>
-        </p:nvSpPr>
-        <p:spPr>
-          <a:xfrm>
-            <a:off x="914400" y="4023360"/>
-            <a:ext cx="3657600" cy="411480"/>
-          </a:xfrm>
-          <a:prstGeom prst="rect">
-            <a:avLst/>
-          </a:prstGeom>
-          <a:noFill/>
-        </p:spPr>
-        <p:txBody>
-          <a:bodyPr wrap="none">
-            <a:spAutoFit/>
-          </a:bodyPr>
-          <a:lstStyle/>
-          <a:p>
-            <a:pPr>
-              <a:defRPr sz="1400" b="1">
-                <a:solidFill>
-                  <a:srgbClr val="00468C"/>
-                </a:solidFill>
-              </a:defRPr>
-            </a:pPr>
-            <a:r>
-              <a:t>EFA &amp; CFA Results</a:t>
-            </a:r>
-          </a:p>
-        </p:txBody>
-      </p:sp>
-      <p:sp>
-        <p:nvSpPr>
-          <p:cNvPr id="23" name="TextBox 22"/>
-          <p:cNvSpPr txBox="1"/>
-          <p:nvPr/>
-        </p:nvSpPr>
-        <p:spPr>
-          <a:xfrm>
-            <a:off x="4754880" y="4023360"/>
-            <a:ext cx="4114800" cy="411480"/>
-          </a:xfrm>
-          <a:prstGeom prst="rect">
-            <a:avLst/>
-          </a:prstGeom>
-          <a:noFill/>
-        </p:spPr>
-        <p:txBody>
-          <a:bodyPr wrap="none">
-            <a:spAutoFit/>
-          </a:bodyPr>
-          <a:lstStyle/>
-          <a:p>
-            <a:pPr>
-              <a:defRPr sz="1300">
-                <a:solidFill>
-                  <a:srgbClr val="323232"/>
-                </a:solidFill>
-              </a:defRPr>
-            </a:pPr>
-            <a:r>
-              <a:t>Statistical Findings</a:t>
-            </a:r>
-          </a:p>
-        </p:txBody>
-      </p:sp>
-      <p:sp>
-        <p:nvSpPr>
-          <p:cNvPr id="24" name="TextBox 23"/>
-          <p:cNvSpPr txBox="1"/>
-          <p:nvPr/>
-        </p:nvSpPr>
-        <p:spPr>
-          <a:xfrm>
-            <a:off x="457200" y="4480560"/>
-            <a:ext cx="457200" cy="411480"/>
-          </a:xfrm>
-          <a:prstGeom prst="rect">
-            <a:avLst/>
-          </a:prstGeom>
-          <a:noFill/>
-        </p:spPr>
-        <p:txBody>
-          <a:bodyPr wrap="none">
-            <a:spAutoFit/>
-          </a:bodyPr>
-          <a:lstStyle/>
-          <a:p>
-            <a:pPr>
-              <a:defRPr sz="1400" b="1">
-                <a:solidFill>
-                  <a:srgbClr val="002060"/>
-                </a:solidFill>
-              </a:defRPr>
-            </a:pPr>
-            <a:r>
-              <a:t>8.</a:t>
-            </a:r>
-          </a:p>
-        </p:txBody>
-      </p:sp>
-      <p:sp>
-        <p:nvSpPr>
-          <p:cNvPr id="25" name="TextBox 24"/>
-          <p:cNvSpPr txBox="1"/>
-          <p:nvPr/>
-        </p:nvSpPr>
-        <p:spPr>
-          <a:xfrm>
-            <a:off x="914400" y="4480560"/>
-            <a:ext cx="3657600" cy="411480"/>
-          </a:xfrm>
-          <a:prstGeom prst="rect">
-            <a:avLst/>
-          </a:prstGeom>
-          <a:noFill/>
-        </p:spPr>
-        <p:txBody>
-          <a:bodyPr wrap="none">
-            <a:spAutoFit/>
-          </a:bodyPr>
-          <a:lstStyle/>
-          <a:p>
-            <a:pPr>
-              <a:defRPr sz="1400" b="1">
-                <a:solidFill>
-                  <a:srgbClr val="00468C"/>
-                </a:solidFill>
-              </a:defRPr>
-            </a:pPr>
-            <a:r>
-              <a:t>Supporting Study</a:t>
-            </a:r>
-          </a:p>
-        </p:txBody>
-      </p:sp>
-      <p:sp>
-        <p:nvSpPr>
-          <p:cNvPr id="26" name="TextBox 25"/>
-          <p:cNvSpPr txBox="1"/>
-          <p:nvPr/>
-        </p:nvSpPr>
-        <p:spPr>
-          <a:xfrm>
-            <a:off x="4754880" y="4480560"/>
-            <a:ext cx="4114800" cy="411480"/>
-          </a:xfrm>
-          <a:prstGeom prst="rect">
-            <a:avLst/>
-          </a:prstGeom>
-          <a:noFill/>
-        </p:spPr>
-        <p:txBody>
-          <a:bodyPr wrap="none">
-            <a:spAutoFit/>
-          </a:bodyPr>
-          <a:lstStyle/>
-          <a:p>
-            <a:pPr>
-              <a:defRPr sz="1300">
-                <a:solidFill>
-                  <a:srgbClr val="323232"/>
-                </a:solidFill>
-              </a:defRPr>
-            </a:pPr>
-            <a:r>
-              <a:t>Satisfaction &amp; Work Performance</a:t>
-            </a:r>
-          </a:p>
-        </p:txBody>
-      </p:sp>
-      <p:sp>
-        <p:nvSpPr>
-          <p:cNvPr id="27" name="TextBox 26"/>
-          <p:cNvSpPr txBox="1"/>
-          <p:nvPr/>
-        </p:nvSpPr>
-        <p:spPr>
-          <a:xfrm>
-            <a:off x="457200" y="4937760"/>
-            <a:ext cx="457200" cy="411480"/>
-          </a:xfrm>
-          <a:prstGeom prst="rect">
-            <a:avLst/>
-          </a:prstGeom>
-          <a:noFill/>
-        </p:spPr>
-        <p:txBody>
-          <a:bodyPr wrap="none">
-            <a:spAutoFit/>
-          </a:bodyPr>
-          <a:lstStyle/>
-          <a:p>
-            <a:pPr>
-              <a:defRPr sz="1400" b="1">
-                <a:solidFill>
-                  <a:srgbClr val="002060"/>
-                </a:solidFill>
-              </a:defRPr>
-            </a:pPr>
-            <a:r>
-              <a:t>9.</a:t>
-            </a:r>
-          </a:p>
-        </p:txBody>
-      </p:sp>
-      <p:sp>
-        <p:nvSpPr>
-          <p:cNvPr id="28" name="TextBox 27"/>
-          <p:cNvSpPr txBox="1"/>
-          <p:nvPr/>
-        </p:nvSpPr>
-        <p:spPr>
-          <a:xfrm>
-            <a:off x="914400" y="4937760"/>
-            <a:ext cx="3657600" cy="411480"/>
-          </a:xfrm>
-          <a:prstGeom prst="rect">
-            <a:avLst/>
-          </a:prstGeom>
-          <a:noFill/>
-        </p:spPr>
-        <p:txBody>
-          <a:bodyPr wrap="none">
-            <a:spAutoFit/>
-          </a:bodyPr>
-          <a:lstStyle/>
-          <a:p>
-            <a:pPr>
-              <a:defRPr sz="1400" b="1">
-                <a:solidFill>
-                  <a:srgbClr val="00468C"/>
-                </a:solidFill>
-              </a:defRPr>
-            </a:pPr>
-            <a:r>
-              <a:t>Discussion &amp; Implications</a:t>
-            </a:r>
-          </a:p>
-        </p:txBody>
-      </p:sp>
-      <p:sp>
-        <p:nvSpPr>
-          <p:cNvPr id="29" name="TextBox 28"/>
-          <p:cNvSpPr txBox="1"/>
-          <p:nvPr/>
-        </p:nvSpPr>
-        <p:spPr>
-          <a:xfrm>
-            <a:off x="4754880" y="4937760"/>
-            <a:ext cx="4114800" cy="411480"/>
-          </a:xfrm>
-          <a:prstGeom prst="rect">
-            <a:avLst/>
-          </a:prstGeom>
-          <a:noFill/>
-        </p:spPr>
-        <p:txBody>
-          <a:bodyPr wrap="none">
-            <a:spAutoFit/>
-          </a:bodyPr>
-          <a:lstStyle/>
-          <a:p>
-            <a:pPr>
-              <a:defRPr sz="1300">
-                <a:solidFill>
-                  <a:srgbClr val="323232"/>
-                </a:solidFill>
-              </a:defRPr>
-            </a:pPr>
-            <a:r>
-              <a:t>Key Findings</a:t>
-            </a:r>
-          </a:p>
-        </p:txBody>
-      </p:sp>
-      <p:sp>
-        <p:nvSpPr>
-          <p:cNvPr id="30" name="TextBox 29"/>
-          <p:cNvSpPr txBox="1"/>
-          <p:nvPr/>
-        </p:nvSpPr>
-        <p:spPr>
-          <a:xfrm>
-            <a:off x="457200" y="5394960"/>
-            <a:ext cx="457200" cy="411480"/>
-          </a:xfrm>
-          <a:prstGeom prst="rect">
-            <a:avLst/>
-          </a:prstGeom>
-          <a:noFill/>
-        </p:spPr>
-        <p:txBody>
-          <a:bodyPr wrap="none">
-            <a:spAutoFit/>
-          </a:bodyPr>
-          <a:lstStyle/>
-          <a:p>
-            <a:pPr>
-              <a:defRPr sz="1400" b="1">
-                <a:solidFill>
-                  <a:srgbClr val="002060"/>
-                </a:solidFill>
-              </a:defRPr>
-            </a:pPr>
-            <a:r>
-              <a:t>10.</a:t>
-            </a:r>
-          </a:p>
-        </p:txBody>
-      </p:sp>
-      <p:sp>
-        <p:nvSpPr>
-          <p:cNvPr id="31" name="TextBox 30"/>
-          <p:cNvSpPr txBox="1"/>
-          <p:nvPr/>
-        </p:nvSpPr>
-        <p:spPr>
-          <a:xfrm>
-            <a:off x="914400" y="5394960"/>
-            <a:ext cx="3657600" cy="411480"/>
-          </a:xfrm>
-          <a:prstGeom prst="rect">
-            <a:avLst/>
-          </a:prstGeom>
-          <a:noFill/>
-        </p:spPr>
-        <p:txBody>
-          <a:bodyPr wrap="none">
-            <a:spAutoFit/>
-          </a:bodyPr>
-          <a:lstStyle/>
-          <a:p>
-            <a:pPr>
-              <a:defRPr sz="1400" b="1">
-                <a:solidFill>
-                  <a:srgbClr val="00468C"/>
-                </a:solidFill>
-              </a:defRPr>
-            </a:pPr>
-            <a:r>
-              <a:t>Comments, Limitations &amp; Improvements</a:t>
-            </a:r>
-          </a:p>
-        </p:txBody>
-      </p:sp>
-      <p:sp>
-        <p:nvSpPr>
-          <p:cNvPr id="32" name="TextBox 31"/>
-          <p:cNvSpPr txBox="1"/>
-          <p:nvPr/>
-        </p:nvSpPr>
-        <p:spPr>
-          <a:xfrm>
-            <a:off x="4754880" y="5394960"/>
-            <a:ext cx="4114800" cy="411480"/>
-          </a:xfrm>
-          <a:prstGeom prst="rect">
-            <a:avLst/>
-          </a:prstGeom>
-          <a:noFill/>
-        </p:spPr>
-        <p:txBody>
-          <a:bodyPr wrap="none">
-            <a:spAutoFit/>
-          </a:bodyPr>
-          <a:lstStyle/>
-          <a:p>
-            <a:pPr>
-              <a:defRPr sz="1300">
-                <a:solidFill>
-                  <a:srgbClr val="323232"/>
-                </a:solidFill>
-              </a:defRPr>
-            </a:pPr>
-            <a:r>
-              <a:t>Critical Analysis</a:t>
-            </a:r>
-          </a:p>
-        </p:txBody>
-      </p:sp>
-      <p:sp>
-        <p:nvSpPr>
-          <p:cNvPr id="33" name="TextBox 32"/>
-          <p:cNvSpPr txBox="1"/>
-          <p:nvPr/>
-        </p:nvSpPr>
-        <p:spPr>
-          <a:xfrm>
-            <a:off x="457200" y="5852160"/>
-            <a:ext cx="457200" cy="411480"/>
-          </a:xfrm>
-          <a:prstGeom prst="rect">
-            <a:avLst/>
-          </a:prstGeom>
-          <a:noFill/>
-        </p:spPr>
-        <p:txBody>
-          <a:bodyPr wrap="none">
-            <a:spAutoFit/>
-          </a:bodyPr>
-          <a:lstStyle/>
-          <a:p>
-            <a:pPr>
-              <a:defRPr sz="1400" b="1">
-                <a:solidFill>
-                  <a:srgbClr val="002060"/>
-                </a:solidFill>
-              </a:defRPr>
-            </a:pPr>
-            <a:r>
-              <a:t>11.</a:t>
-            </a:r>
-          </a:p>
-        </p:txBody>
-      </p:sp>
-      <p:sp>
-        <p:nvSpPr>
-          <p:cNvPr id="34" name="TextBox 33"/>
-          <p:cNvSpPr txBox="1"/>
-          <p:nvPr/>
-        </p:nvSpPr>
-        <p:spPr>
-          <a:xfrm>
-            <a:off x="914400" y="5852160"/>
-            <a:ext cx="3657600" cy="411480"/>
-          </a:xfrm>
-          <a:prstGeom prst="rect">
-            <a:avLst/>
-          </a:prstGeom>
-          <a:noFill/>
-        </p:spPr>
-        <p:txBody>
-          <a:bodyPr wrap="none">
-            <a:spAutoFit/>
-          </a:bodyPr>
-          <a:lstStyle/>
-          <a:p>
-            <a:pPr>
-              <a:defRPr sz="1400" b="1">
-                <a:solidFill>
-                  <a:srgbClr val="00468C"/>
-                </a:solidFill>
-              </a:defRPr>
-            </a:pPr>
-            <a:r>
-              <a:t>Conclusion &amp; References</a:t>
-            </a:r>
-          </a:p>
-        </p:txBody>
-      </p:sp>
-      <p:sp>
-        <p:nvSpPr>
-          <p:cNvPr id="35" name="TextBox 34"/>
-          <p:cNvSpPr txBox="1"/>
-          <p:nvPr/>
-        </p:nvSpPr>
-        <p:spPr>
-          <a:xfrm>
-            <a:off x="4754880" y="5852160"/>
-            <a:ext cx="4114800" cy="411480"/>
-          </a:xfrm>
-          <a:prstGeom prst="rect">
-            <a:avLst/>
-          </a:prstGeom>
-          <a:noFill/>
-        </p:spPr>
-        <p:txBody>
-          <a:bodyPr wrap="none">
-            <a:spAutoFit/>
-          </a:bodyPr>
-          <a:lstStyle/>
-          <a:p>
-            <a:pPr>
-              <a:defRPr sz="1300">
-                <a:solidFill>
-                  <a:srgbClr val="323232"/>
-                </a:solidFill>
-              </a:defRPr>
-            </a:pPr>
-            <a:r>
-              <a:t>Summary</a:t>
+              <a:t>The Dziuba et al. (2020) study reinforces the practical importance of satisfaction research by linking it directly to employee performance and safety</a:t>
             </a:r>
           </a:p>
         </p:txBody>
@@ -7761,7 +8622,7 @@
 </p:sld>
 </file>
 
-<file path=ppt/slides/slide20.xml><?xml version="1.0" encoding="utf-8"?>
+<file path=ppt/slides/slide23.xml><?xml version="1.0" encoding="utf-8"?>
 <p:sld xmlns:a="http://schemas.openxmlformats.org/drawingml/2006/main" xmlns:p="http://schemas.openxmlformats.org/presentationml/2006/main" xmlns:r="http://schemas.openxmlformats.org/officeDocument/2006/relationships">
   <p:cSld>
     <p:bg>
@@ -8000,7 +8861,7 @@
 </p:sld>
 </file>
 
-<file path=ppt/slides/slide21.xml><?xml version="1.0" encoding="utf-8"?>
+<file path=ppt/slides/slide24.xml><?xml version="1.0" encoding="utf-8"?>
 <p:sld xmlns:a="http://schemas.openxmlformats.org/drawingml/2006/main" xmlns:p="http://schemas.openxmlformats.org/presentationml/2006/main" xmlns:r="http://schemas.openxmlformats.org/officeDocument/2006/relationships">
   <p:cSld>
     <p:bg>
@@ -8291,7 +9152,7 @@
 </p:sld>
 </file>
 
-<file path=ppt/slides/slide22.xml><?xml version="1.0" encoding="utf-8"?>
+<file path=ppt/slides/slide25.xml><?xml version="1.0" encoding="utf-8"?>
 <p:sld xmlns:a="http://schemas.openxmlformats.org/drawingml/2006/main" xmlns:p="http://schemas.openxmlformats.org/presentationml/2006/main" xmlns:r="http://schemas.openxmlformats.org/officeDocument/2006/relationships">
   <p:cSld>
     <p:bg>
@@ -8501,7 +9362,7 @@
 </p:sld>
 </file>
 
-<file path=ppt/slides/slide23.xml><?xml version="1.0" encoding="utf-8"?>
+<file path=ppt/slides/slide26.xml><?xml version="1.0" encoding="utf-8"?>
 <p:sld xmlns:a="http://schemas.openxmlformats.org/drawingml/2006/main" xmlns:p="http://schemas.openxmlformats.org/presentationml/2006/main" xmlns:r="http://schemas.openxmlformats.org/officeDocument/2006/relationships">
   <p:cSld>
     <p:bg>
@@ -8764,7 +9625,7 @@
 </p:sld>
 </file>
 
-<file path=ppt/slides/slide24.xml><?xml version="1.0" encoding="utf-8"?>
+<file path=ppt/slides/slide27.xml><?xml version="1.0" encoding="utf-8"?>
 <p:sld xmlns:a="http://schemas.openxmlformats.org/drawingml/2006/main" xmlns:p="http://schemas.openxmlformats.org/presentationml/2006/main" xmlns:r="http://schemas.openxmlformats.org/officeDocument/2006/relationships">
   <p:cSld>
     <p:bg>

--- a/Factor_Analysis_JobSatisfaction_Presentation.pptx
+++ b/Factor_Analysis_JobSatisfaction_Presentation.pptx
@@ -3474,7 +3474,7 @@
               </a:defRPr>
             </a:pPr>
             <a:r>
-              <a:t>Chi-square = 31,831.572, df = 528, p = 0.000</a:t>
+              <a:t>p = 0.000 (significant)</a:t>
             </a:r>
           </a:p>
           <a:p>
@@ -3727,7 +3727,7 @@
               </a:defRPr>
             </a:pPr>
             <a:r>
-              <a:t>Subscale intercorrelations range from 0.11 to 0.59 (Spector, 1985)</a:t>
+              <a:t>Spector (1985) reported subscale intercorrelations range 0.11 to 0.59</a:t>
             </a:r>
           </a:p>
           <a:p>
@@ -3795,7 +3795,7 @@
               </a:defRPr>
             </a:pPr>
             <a:r>
-              <a:t>Illustrative values based on the</a:t>
+              <a:t>Values derived from the range</a:t>
             </a:r>
           </a:p>
           <a:p>
@@ -3807,7 +3807,7 @@
               </a:defRPr>
             </a:pPr>
             <a:r>
-              <a:t>reported intercorrelation range</a:t>
+              <a:t>reported by Spector (1985)</a:t>
             </a:r>
           </a:p>
         </p:txBody>
@@ -4084,7 +4084,19 @@
               </a:defRPr>
             </a:pPr>
             <a:r>
-              <a:t>6 clear factors emerged from the 36 items</a:t>
+              <a:t>6 components with eigenvalue &gt;= 1.0</a:t>
+            </a:r>
+          </a:p>
+          <a:p>
+            <a:pPr>
+              <a:defRPr sz="1200">
+                <a:solidFill>
+                  <a:srgbClr val="323232"/>
+                </a:solidFill>
+              </a:defRPr>
+            </a:pPr>
+            <a:r>
+              <a:t>Total: 56.23% of variance explained</a:t>
             </a:r>
           </a:p>
           <a:p>
@@ -4101,7 +4113,7 @@
               </a:defRPr>
             </a:pPr>
             <a:r>
-              <a:t>Note: Eigenvalues are illustrative;</a:t>
+              <a:t>Source: Karaferis et al. (2022),</a:t>
             </a:r>
           </a:p>
           <a:p>
@@ -4113,7 +4125,7 @@
               </a:defRPr>
             </a:pPr>
             <a:r>
-              <a:t>6-factor solution directly reported</a:t>
+              <a:t>Table 6</a:t>
             </a:r>
           </a:p>
         </p:txBody>
@@ -4349,7 +4361,7 @@
               </a:defRPr>
             </a:pPr>
             <a:r>
-              <a:t>Each item loads strongly</a:t>
+              <a:t>20 items retained across</a:t>
             </a:r>
           </a:p>
           <a:p>
@@ -4361,7 +4373,7 @@
               </a:defRPr>
             </a:pPr>
             <a:r>
-              <a:t>on only ONE factor</a:t>
+              <a:t>6 factors (from original 36)</a:t>
             </a:r>
           </a:p>
           <a:p>
@@ -4378,7 +4390,7 @@
               </a:defRPr>
             </a:pPr>
             <a:r>
-              <a:t>Illustrative values; items</a:t>
+              <a:t>Source: Karaferis et al. (2022),</a:t>
             </a:r>
           </a:p>
           <a:p>
@@ -4390,7 +4402,7 @@
               </a:defRPr>
             </a:pPr>
             <a:r>
-              <a:t>with loadings &gt;= 0.50 retained</a:t>
+              <a:t>Table 7 — cross-loadings &lt; 0.40 suppressed</a:t>
             </a:r>
           </a:p>
         </p:txBody>
@@ -4655,7 +4667,19 @@
               </a:defRPr>
             </a:pPr>
             <a:r>
-              <a:t>Operating Procedures is lowest (0.38) - weakest fit</a:t>
+              <a:t>Operating Procedures is lowest - weakest fit</a:t>
+            </a:r>
+          </a:p>
+          <a:p>
+            <a:pPr>
+              <a:defRPr sz="1100">
+                <a:solidFill>
+                  <a:srgbClr val="323232"/>
+                </a:solidFill>
+              </a:defRPr>
+            </a:pPr>
+            <a:r>
+              <a:t>(this dimension was not retained in final 6-factor model)</a:t>
             </a:r>
           </a:p>
           <a:p>
@@ -4672,7 +4696,7 @@
               </a:defRPr>
             </a:pPr>
             <a:r>
-              <a:t>Illustrative values based on</a:t>
+              <a:t>Estimated from reported factor</a:t>
             </a:r>
           </a:p>
           <a:p>
@@ -4684,7 +4708,7 @@
               </a:defRPr>
             </a:pPr>
             <a:r>
-              <a:t>6-factor solution</a:t>
+              <a:t>loadings; not directly reported in paper</a:t>
             </a:r>
           </a:p>
         </p:txBody>
@@ -4891,7 +4915,7 @@
               </a:defRPr>
             </a:pPr>
             <a:r>
-              <a:t>Results:</a:t>
+              <a:t>Results (Table 8):</a:t>
             </a:r>
           </a:p>
           <a:p>
@@ -4903,7 +4927,7 @@
               </a:defRPr>
             </a:pPr>
             <a:r>
-              <a:t>Overall scale: α = 0.81 (Good)</a:t>
+              <a:t>Overall scale (20 items): α = 0.81</a:t>
             </a:r>
           </a:p>
           <a:p>
@@ -4915,7 +4939,7 @@
               </a:defRPr>
             </a:pPr>
             <a:r>
-              <a:t>Range: 0.61 to 0.81</a:t>
+              <a:t>Range: 0.60 to 0.81 across factors</a:t>
             </a:r>
           </a:p>
           <a:p>
@@ -4932,7 +4956,7 @@
               </a:defRPr>
             </a:pPr>
             <a:r>
-              <a:t>5 of 6 dimensions meet</a:t>
+              <a:t>Supervision is strongest (0.81)</a:t>
             </a:r>
           </a:p>
           <a:p>
@@ -4944,7 +4968,7 @@
               </a:defRPr>
             </a:pPr>
             <a:r>
-              <a:t>the 0.70 threshold</a:t>
+              <a:t>Communication is lowest (0.60)</a:t>
             </a:r>
           </a:p>
           <a:p>
@@ -4961,7 +4985,7 @@
               </a:defRPr>
             </a:pPr>
             <a:r>
-              <a:t>Source: Tsounis &amp; Sarafis (2022)</a:t>
+              <a:t>Source: Karaferis et al. (2022)</a:t>
             </a:r>
           </a:p>
         </p:txBody>
@@ -5811,7 +5835,7 @@
               </a:defRPr>
             </a:pPr>
             <a:r>
-              <a:t>Illustrative variance distribution based on the 6-factor solution reported in Tsounis &amp; Sarafis (2022). Factor 1 (Benefits &amp; Salary) explains the most variance.</a:t>
+              <a:t>Rotated sums of squared loadings from Karaferis, Aletras &amp; Niakas (2022), Table 6. Factor 1 (Benefits &amp; Salary) explains the most variance (14.13%).</a:t>
             </a:r>
           </a:p>
         </p:txBody>
@@ -6071,7 +6095,7 @@
               </a:defRPr>
             </a:pPr>
             <a:r>
-              <a:t>Tsounis &amp; Sarafis (2022) found</a:t>
+              <a:t>Karaferis et al. (2022) found</a:t>
             </a:r>
           </a:p>
           <a:p>
@@ -6083,7 +6107,7 @@
               </a:defRPr>
             </a:pPr>
             <a:r>
-              <a:t>6 dimensions (some merged)</a:t>
+              <a:t>6 factors from 20 retained items</a:t>
             </a:r>
           </a:p>
           <a:p>
@@ -6124,7 +6148,7 @@
               </a:defRPr>
             </a:pPr>
             <a:r>
-              <a:t>Chart shows typical α ranges</a:t>
+              <a:t>Chart compares Spector vs. present study</a:t>
             </a:r>
           </a:p>
         </p:txBody>
@@ -8331,7 +8355,7 @@
               </a:defRPr>
             </a:pPr>
             <a:r>
-              <a:t>Spector's 36-item JSS instrument, originally with 9 dimensions, showed a stable 6-factor structure in the studied population, with good reliability (overall α = 0.81) and model fit (CFI = 0.906)</a:t>
+              <a:t>Spector's 36-item JSS instrument, originally with 9 dimensions, showed a stable 6-factor structure with 20 retained items in 3,278 employees, with good reliability (overall α = 0.81) and model fit (CFI = 0.906)</a:t>
             </a:r>
           </a:p>
           <a:p>
@@ -8507,7 +8531,7 @@
               </a:defRPr>
             </a:pPr>
             <a:r>
-              <a:t>Large sample size (n = 590) ensures statistical power and reliable factor estimates</a:t>
+              <a:t>Large sample size (n = 3,278 across 13 hospitals) ensures statistical power and reliable factor estimates</a:t>
             </a:r>
           </a:p>
           <a:p>
@@ -8592,7 +8616,7 @@
               </a:defRPr>
             </a:pPr>
             <a:r>
-              <a:t>Two dimensions (Nature of Work and Communication) showed lower reliability, which could be improved with revised items</a:t>
+              <a:t>Several dimensions (Communication α=0.60, Nature of Work α=0.61, Colleagues' Support α=0.66) showed lower reliability, which could be improved with revised items</a:t>
             </a:r>
           </a:p>
           <a:p>
@@ -8790,7 +8814,7 @@
               </a:defRPr>
             </a:pPr>
             <a:r>
-              <a:t>Two dimensions showed Cronbach's alpha below the 0.70 threshold (Nature of Work = 0.61, Communication = 0.67)</a:t>
+              <a:t>Four of six factors showed Cronbach's alpha below 0.70 (Communication = 0.60, Nature of Work = 0.61, Colleagues' Support = 0.66, Management's Attitude = 0.67)</a:t>
             </a:r>
           </a:p>
           <a:p>
@@ -9479,7 +9503,7 @@
               </a:defRPr>
             </a:pPr>
             <a:r>
-              <a:t>1. Tsounis, A. &amp; Sarafis, P. (2022). "Determining Dimensions of Job Satisfaction in Healthcare Using Factor Analysis." BMC Psychology, 10, Article 240.</a:t>
+              <a:t>1. Karaferis, D., Aletras, V. &amp; Niakas, D. (2022). "Determining Dimensions of Job Satisfaction in Healthcare Using Factor Analysis." BMC Psychology, 10, Article 240.</a:t>
             </a:r>
           </a:p>
           <a:p>
@@ -10119,7 +10143,7 @@
               </a:defRPr>
             </a:pPr>
             <a:r>
-              <a:t>Tsounis, A. &amp; Sarafis, P. (2022). "Determining Dimensions of Job Satisfaction in Healthcare Using Factor Analysis."</a:t>
+              <a:t>Karaferis, D., Aletras, V. &amp; Niakas, D. (2022). "Determining Dimensions of Job Satisfaction in Healthcare Using Factor Analysis."</a:t>
             </a:r>
           </a:p>
           <a:p>
@@ -10160,7 +10184,7 @@
               </a:defRPr>
             </a:pPr>
             <a:r>
-              <a:t>Method: EFA + CFA | Sample: 590 employees | Instrument: Spector JSS (36 items)</a:t>
+              <a:t>Method: EFA + CFA | Sample: 3,278 employees from 13 hospitals | Instrument: Spector JSS (36 items)</a:t>
             </a:r>
           </a:p>
           <a:p>
@@ -11279,7 +11303,7 @@
               </a:defRPr>
             </a:pPr>
             <a:r>
-              <a:t>Tsounis &amp; Sarafis (2022)</a:t>
+              <a:t>Karaferis, Aletras &amp; Niakas (2022)</a:t>
             </a:r>
           </a:p>
         </p:txBody>
@@ -11326,7 +11350,7 @@
               </a:defRPr>
             </a:pPr>
             <a:r>
-              <a:t>Large organizational setting with multiple departments</a:t>
+              <a:t>13 public hospitals in Athens, Greece (1st Regional Health Authority of Attica)</a:t>
             </a:r>
           </a:p>
           <a:p>
@@ -11338,7 +11362,7 @@
               </a:defRPr>
             </a:pPr>
             <a:r>
-              <a:t>590 employees surveyed</a:t>
+              <a:t>3,278 healthcare employees surveyed (doctors, nurses, other professionals)</a:t>
             </a:r>
           </a:p>
           <a:p>
@@ -11508,7 +11532,7 @@
               </a:defRPr>
             </a:pPr>
             <a:r>
-              <a:t>n = 590 employees</a:t>
+              <a:t>n = 3,278 employees</a:t>
             </a:r>
           </a:p>
           <a:p>
@@ -11537,7 +11561,7 @@
               </a:defRPr>
             </a:pPr>
             <a:r>
-              <a:t>High participation across departments</a:t>
+              <a:t>81.95% (4,000 distributed, 3,278 returned)</a:t>
             </a:r>
           </a:p>
           <a:p>
